--- a/오픈소스소프트웨어/3주차_.AWS_EC2.pptx
+++ b/오픈소스소프트웨어/3주차_.AWS_EC2.pptx
@@ -2609,6 +2609,13 @@
           </a:solidFill>
           <a:ln/>
         </p:spPr>
+        <p:txBody>
+          <a:bodyPr/>
+          <a:lstStyle/>
+          <a:p>
+            <a:endParaRPr lang="ko-KR" altLang="en-US"/>
+          </a:p>
+        </p:txBody>
       </p:sp>
       <p:sp>
         <p:nvSpPr>
@@ -2631,6 +2638,13 @@
           </a:solidFill>
           <a:ln/>
         </p:spPr>
+        <p:txBody>
+          <a:bodyPr/>
+          <a:lstStyle/>
+          <a:p>
+            <a:endParaRPr lang="ko-KR" altLang="en-US"/>
+          </a:p>
+        </p:txBody>
       </p:sp>
       <p:sp>
         <p:nvSpPr>
@@ -2653,6 +2667,13 @@
           </a:solidFill>
           <a:ln/>
         </p:spPr>
+        <p:txBody>
+          <a:bodyPr/>
+          <a:lstStyle/>
+          <a:p>
+            <a:endParaRPr lang="ko-KR" altLang="en-US"/>
+          </a:p>
+        </p:txBody>
       </p:sp>
       <p:sp>
         <p:nvSpPr>
@@ -2675,6 +2696,13 @@
           </a:solidFill>
           <a:ln/>
         </p:spPr>
+        <p:txBody>
+          <a:bodyPr/>
+          <a:lstStyle/>
+          <a:p>
+            <a:endParaRPr lang="ko-KR" altLang="en-US"/>
+          </a:p>
+        </p:txBody>
       </p:sp>
       <p:sp>
         <p:nvSpPr>
@@ -2697,6 +2725,13 @@
           </a:solidFill>
           <a:ln/>
         </p:spPr>
+        <p:txBody>
+          <a:bodyPr/>
+          <a:lstStyle/>
+          <a:p>
+            <a:endParaRPr lang="ko-KR" altLang="en-US"/>
+          </a:p>
+        </p:txBody>
       </p:sp>
       <p:sp>
         <p:nvSpPr>
@@ -2719,6 +2754,13 @@
           </a:solidFill>
           <a:ln/>
         </p:spPr>
+        <p:txBody>
+          <a:bodyPr/>
+          <a:lstStyle/>
+          <a:p>
+            <a:endParaRPr lang="ko-KR" altLang="en-US"/>
+          </a:p>
+        </p:txBody>
       </p:sp>
       <p:sp>
         <p:nvSpPr>
@@ -2741,6 +2783,13 @@
           </a:solidFill>
           <a:ln/>
         </p:spPr>
+        <p:txBody>
+          <a:bodyPr/>
+          <a:lstStyle/>
+          <a:p>
+            <a:endParaRPr lang="ko-KR" altLang="en-US"/>
+          </a:p>
+        </p:txBody>
       </p:sp>
       <p:sp>
         <p:nvSpPr>
@@ -2763,6 +2812,13 @@
           </a:solidFill>
           <a:ln/>
         </p:spPr>
+        <p:txBody>
+          <a:bodyPr/>
+          <a:lstStyle/>
+          <a:p>
+            <a:endParaRPr lang="ko-KR" altLang="en-US"/>
+          </a:p>
+        </p:txBody>
       </p:sp>
       <p:sp>
         <p:nvSpPr>
@@ -2788,6 +2844,13 @@
             <a:prstDash val="solid"/>
           </a:ln>
         </p:spPr>
+        <p:txBody>
+          <a:bodyPr/>
+          <a:lstStyle/>
+          <a:p>
+            <a:endParaRPr lang="ko-KR" altLang="en-US"/>
+          </a:p>
+        </p:txBody>
       </p:sp>
       <p:sp>
         <p:nvSpPr>
@@ -2813,6 +2876,13 @@
             <a:prstDash val="solid"/>
           </a:ln>
         </p:spPr>
+        <p:txBody>
+          <a:bodyPr/>
+          <a:lstStyle/>
+          <a:p>
+            <a:endParaRPr lang="ko-KR" altLang="en-US"/>
+          </a:p>
+        </p:txBody>
       </p:sp>
       <p:sp>
         <p:nvSpPr>
@@ -2838,6 +2908,13 @@
             <a:prstDash val="solid"/>
           </a:ln>
         </p:spPr>
+        <p:txBody>
+          <a:bodyPr/>
+          <a:lstStyle/>
+          <a:p>
+            <a:endParaRPr lang="ko-KR" altLang="en-US"/>
+          </a:p>
+        </p:txBody>
       </p:sp>
       <p:sp>
         <p:nvSpPr>
@@ -2863,6 +2940,13 @@
             <a:prstDash val="solid"/>
           </a:ln>
         </p:spPr>
+        <p:txBody>
+          <a:bodyPr/>
+          <a:lstStyle/>
+          <a:p>
+            <a:endParaRPr lang="ko-KR" altLang="en-US"/>
+          </a:p>
+        </p:txBody>
       </p:sp>
       <p:sp>
         <p:nvSpPr>
@@ -2888,6 +2972,13 @@
             <a:prstDash val="solid"/>
           </a:ln>
         </p:spPr>
+        <p:txBody>
+          <a:bodyPr/>
+          <a:lstStyle/>
+          <a:p>
+            <a:endParaRPr lang="ko-KR" altLang="en-US"/>
+          </a:p>
+        </p:txBody>
       </p:sp>
       <p:sp>
         <p:nvSpPr>
@@ -2913,6 +3004,13 @@
             <a:prstDash val="solid"/>
           </a:ln>
         </p:spPr>
+        <p:txBody>
+          <a:bodyPr/>
+          <a:lstStyle/>
+          <a:p>
+            <a:endParaRPr lang="ko-KR" altLang="en-US"/>
+          </a:p>
+        </p:txBody>
       </p:sp>
       <p:sp>
         <p:nvSpPr>
@@ -2938,6 +3036,13 @@
             <a:prstDash val="solid"/>
           </a:ln>
         </p:spPr>
+        <p:txBody>
+          <a:bodyPr/>
+          <a:lstStyle/>
+          <a:p>
+            <a:endParaRPr lang="ko-KR" altLang="en-US"/>
+          </a:p>
+        </p:txBody>
       </p:sp>
       <p:sp>
         <p:nvSpPr>
@@ -2967,6 +3072,13 @@
             <a:prstDash val="solid"/>
           </a:ln>
         </p:spPr>
+        <p:txBody>
+          <a:bodyPr/>
+          <a:lstStyle/>
+          <a:p>
+            <a:endParaRPr lang="ko-KR" altLang="en-US"/>
+          </a:p>
+        </p:txBody>
       </p:sp>
       <p:sp>
         <p:nvSpPr>
@@ -3265,6 +3377,13 @@
             <a:prstDash val="solid"/>
           </a:ln>
         </p:spPr>
+        <p:txBody>
+          <a:bodyPr/>
+          <a:lstStyle/>
+          <a:p>
+            <a:endParaRPr lang="ko-KR" altLang="en-US"/>
+          </a:p>
+        </p:txBody>
       </p:sp>
       <p:sp>
         <p:nvSpPr>
@@ -3330,7 +3449,7 @@
               <a:buNone/>
             </a:pPr>
             <a:r>
-              <a:rPr lang="en-US" sz="2800" b="1" dirty="0" smtClean="0">
+              <a:rPr lang="en-US" sz="2800" b="1" dirty="0">
                 <a:solidFill>
                   <a:srgbClr val="232F3E"/>
                 </a:solidFill>
@@ -3338,18 +3457,7 @@
                 <a:ea typeface="맑은 고딕" pitchFamily="34" charset="-122"/>
                 <a:cs typeface="맑은 고딕" pitchFamily="34" charset="-120"/>
               </a:rPr>
-              <a:t>Creating </a:t>
-            </a:r>
-            <a:r>
-              <a:rPr lang="en-US" sz="2800" b="1" dirty="0">
-                <a:solidFill>
-                  <a:srgbClr val="232F3E"/>
-                </a:solidFill>
-                <a:latin typeface="맑은 고딕" pitchFamily="34" charset="0"/>
-                <a:ea typeface="맑은 고딕" pitchFamily="34" charset="-122"/>
-                <a:cs typeface="맑은 고딕" pitchFamily="34" charset="-120"/>
-              </a:rPr>
-              <a:t>Key Pairs</a:t>
+              <a:t>Creating Key Pairs</a:t>
             </a:r>
             <a:endParaRPr lang="en-US" sz="2800" dirty="0"/>
           </a:p>
@@ -3381,6 +3489,13 @@
             </a:outerShdw>
           </a:effectLst>
         </p:spPr>
+        <p:txBody>
+          <a:bodyPr/>
+          <a:lstStyle/>
+          <a:p>
+            <a:endParaRPr lang="ko-KR" altLang="en-US"/>
+          </a:p>
+        </p:txBody>
       </p:sp>
       <p:sp>
         <p:nvSpPr>
@@ -3454,6 +3569,13 @@
             </a:outerShdw>
           </a:effectLst>
         </p:spPr>
+        <p:txBody>
+          <a:bodyPr/>
+          <a:lstStyle/>
+          <a:p>
+            <a:endParaRPr lang="ko-KR" altLang="en-US"/>
+          </a:p>
+        </p:txBody>
       </p:sp>
       <p:sp>
         <p:nvSpPr>
@@ -3476,6 +3598,13 @@
           </a:solidFill>
           <a:ln/>
         </p:spPr>
+        <p:txBody>
+          <a:bodyPr/>
+          <a:lstStyle/>
+          <a:p>
+            <a:endParaRPr lang="ko-KR" altLang="en-US"/>
+          </a:p>
+        </p:txBody>
       </p:sp>
       <p:sp>
         <p:nvSpPr>
@@ -3496,6 +3625,13 @@
           </a:solidFill>
           <a:ln/>
         </p:spPr>
+        <p:txBody>
+          <a:bodyPr/>
+          <a:lstStyle/>
+          <a:p>
+            <a:endParaRPr lang="ko-KR" altLang="en-US"/>
+          </a:p>
+        </p:txBody>
       </p:sp>
       <p:sp>
         <p:nvSpPr>
@@ -3519,6 +3655,13 @@
             <a:prstDash val="solid"/>
           </a:ln>
         </p:spPr>
+        <p:txBody>
+          <a:bodyPr/>
+          <a:lstStyle/>
+          <a:p>
+            <a:endParaRPr lang="ko-KR" altLang="en-US"/>
+          </a:p>
+        </p:txBody>
       </p:sp>
       <p:sp>
         <p:nvSpPr>
@@ -3539,6 +3682,13 @@
           </a:solidFill>
           <a:ln/>
         </p:spPr>
+        <p:txBody>
+          <a:bodyPr/>
+          <a:lstStyle/>
+          <a:p>
+            <a:endParaRPr lang="ko-KR" altLang="en-US"/>
+          </a:p>
+        </p:txBody>
       </p:sp>
       <p:sp>
         <p:nvSpPr>
@@ -3559,6 +3709,13 @@
           </a:solidFill>
           <a:ln/>
         </p:spPr>
+        <p:txBody>
+          <a:bodyPr/>
+          <a:lstStyle/>
+          <a:p>
+            <a:endParaRPr lang="ko-KR" altLang="en-US"/>
+          </a:p>
+        </p:txBody>
       </p:sp>
       <p:sp>
         <p:nvSpPr>
@@ -3579,6 +3736,13 @@
           </a:solidFill>
           <a:ln/>
         </p:spPr>
+        <p:txBody>
+          <a:bodyPr/>
+          <a:lstStyle/>
+          <a:p>
+            <a:endParaRPr lang="ko-KR" altLang="en-US"/>
+          </a:p>
+        </p:txBody>
       </p:sp>
       <p:pic>
         <p:nvPicPr>
@@ -3630,6 +3794,13 @@
             </a:outerShdw>
           </a:effectLst>
         </p:spPr>
+        <p:txBody>
+          <a:bodyPr/>
+          <a:lstStyle/>
+          <a:p>
+            <a:endParaRPr lang="ko-KR" altLang="en-US"/>
+          </a:p>
+        </p:txBody>
       </p:sp>
       <p:sp>
         <p:nvSpPr>
@@ -3703,6 +3874,13 @@
             </a:outerShdw>
           </a:effectLst>
         </p:spPr>
+        <p:txBody>
+          <a:bodyPr/>
+          <a:lstStyle/>
+          <a:p>
+            <a:endParaRPr lang="ko-KR" altLang="en-US"/>
+          </a:p>
+        </p:txBody>
       </p:sp>
       <p:sp>
         <p:nvSpPr>
@@ -3725,6 +3903,13 @@
           </a:solidFill>
           <a:ln/>
         </p:spPr>
+        <p:txBody>
+          <a:bodyPr/>
+          <a:lstStyle/>
+          <a:p>
+            <a:endParaRPr lang="ko-KR" altLang="en-US"/>
+          </a:p>
+        </p:txBody>
       </p:sp>
       <p:sp>
         <p:nvSpPr>
@@ -3745,6 +3930,13 @@
           </a:solidFill>
           <a:ln/>
         </p:spPr>
+        <p:txBody>
+          <a:bodyPr/>
+          <a:lstStyle/>
+          <a:p>
+            <a:endParaRPr lang="ko-KR" altLang="en-US"/>
+          </a:p>
+        </p:txBody>
       </p:sp>
       <p:sp>
         <p:nvSpPr>
@@ -3768,6 +3960,13 @@
             <a:prstDash val="solid"/>
           </a:ln>
         </p:spPr>
+        <p:txBody>
+          <a:bodyPr/>
+          <a:lstStyle/>
+          <a:p>
+            <a:endParaRPr lang="ko-KR" altLang="en-US"/>
+          </a:p>
+        </p:txBody>
       </p:sp>
       <p:sp>
         <p:nvSpPr>
@@ -3788,6 +3987,13 @@
           </a:solidFill>
           <a:ln/>
         </p:spPr>
+        <p:txBody>
+          <a:bodyPr/>
+          <a:lstStyle/>
+          <a:p>
+            <a:endParaRPr lang="ko-KR" altLang="en-US"/>
+          </a:p>
+        </p:txBody>
       </p:sp>
       <p:sp>
         <p:nvSpPr>
@@ -3808,6 +4014,13 @@
           </a:solidFill>
           <a:ln/>
         </p:spPr>
+        <p:txBody>
+          <a:bodyPr/>
+          <a:lstStyle/>
+          <a:p>
+            <a:endParaRPr lang="ko-KR" altLang="en-US"/>
+          </a:p>
+        </p:txBody>
       </p:sp>
       <p:sp>
         <p:nvSpPr>
@@ -3828,6 +4041,13 @@
           </a:solidFill>
           <a:ln/>
         </p:spPr>
+        <p:txBody>
+          <a:bodyPr/>
+          <a:lstStyle/>
+          <a:p>
+            <a:endParaRPr lang="ko-KR" altLang="en-US"/>
+          </a:p>
+        </p:txBody>
       </p:sp>
       <p:pic>
         <p:nvPicPr>
@@ -4027,6 +4247,13 @@
           </a:solidFill>
           <a:ln/>
         </p:spPr>
+        <p:txBody>
+          <a:bodyPr/>
+          <a:lstStyle/>
+          <a:p>
+            <a:endParaRPr lang="ko-KR" altLang="en-US"/>
+          </a:p>
+        </p:txBody>
       </p:sp>
       <p:sp>
         <p:nvSpPr>
@@ -4049,6 +4276,13 @@
           </a:solidFill>
           <a:ln/>
         </p:spPr>
+        <p:txBody>
+          <a:bodyPr/>
+          <a:lstStyle/>
+          <a:p>
+            <a:endParaRPr lang="ko-KR" altLang="en-US"/>
+          </a:p>
+        </p:txBody>
       </p:sp>
       <p:sp>
         <p:nvSpPr>
@@ -4071,6 +4305,13 @@
           </a:solidFill>
           <a:ln/>
         </p:spPr>
+        <p:txBody>
+          <a:bodyPr/>
+          <a:lstStyle/>
+          <a:p>
+            <a:endParaRPr lang="ko-KR" altLang="en-US"/>
+          </a:p>
+        </p:txBody>
       </p:sp>
       <p:sp>
         <p:nvSpPr>
@@ -4093,6 +4334,13 @@
           </a:solidFill>
           <a:ln/>
         </p:spPr>
+        <p:txBody>
+          <a:bodyPr/>
+          <a:lstStyle/>
+          <a:p>
+            <a:endParaRPr lang="ko-KR" altLang="en-US"/>
+          </a:p>
+        </p:txBody>
       </p:sp>
       <p:sp>
         <p:nvSpPr>
@@ -4115,6 +4363,13 @@
           </a:solidFill>
           <a:ln/>
         </p:spPr>
+        <p:txBody>
+          <a:bodyPr/>
+          <a:lstStyle/>
+          <a:p>
+            <a:endParaRPr lang="ko-KR" altLang="en-US"/>
+          </a:p>
+        </p:txBody>
       </p:sp>
       <p:sp>
         <p:nvSpPr>
@@ -4137,6 +4392,13 @@
           </a:solidFill>
           <a:ln/>
         </p:spPr>
+        <p:txBody>
+          <a:bodyPr/>
+          <a:lstStyle/>
+          <a:p>
+            <a:endParaRPr lang="ko-KR" altLang="en-US"/>
+          </a:p>
+        </p:txBody>
       </p:sp>
       <p:sp>
         <p:nvSpPr>
@@ -4159,6 +4421,13 @@
           </a:solidFill>
           <a:ln/>
         </p:spPr>
+        <p:txBody>
+          <a:bodyPr/>
+          <a:lstStyle/>
+          <a:p>
+            <a:endParaRPr lang="ko-KR" altLang="en-US"/>
+          </a:p>
+        </p:txBody>
       </p:sp>
       <p:sp>
         <p:nvSpPr>
@@ -4181,6 +4450,13 @@
           </a:solidFill>
           <a:ln/>
         </p:spPr>
+        <p:txBody>
+          <a:bodyPr/>
+          <a:lstStyle/>
+          <a:p>
+            <a:endParaRPr lang="ko-KR" altLang="en-US"/>
+          </a:p>
+        </p:txBody>
       </p:sp>
       <p:sp>
         <p:nvSpPr>
@@ -4206,6 +4482,13 @@
             <a:prstDash val="solid"/>
           </a:ln>
         </p:spPr>
+        <p:txBody>
+          <a:bodyPr/>
+          <a:lstStyle/>
+          <a:p>
+            <a:endParaRPr lang="ko-KR" altLang="en-US"/>
+          </a:p>
+        </p:txBody>
       </p:sp>
       <p:sp>
         <p:nvSpPr>
@@ -4231,6 +4514,13 @@
             <a:prstDash val="solid"/>
           </a:ln>
         </p:spPr>
+        <p:txBody>
+          <a:bodyPr/>
+          <a:lstStyle/>
+          <a:p>
+            <a:endParaRPr lang="ko-KR" altLang="en-US"/>
+          </a:p>
+        </p:txBody>
       </p:sp>
       <p:sp>
         <p:nvSpPr>
@@ -4256,6 +4546,13 @@
             <a:prstDash val="solid"/>
           </a:ln>
         </p:spPr>
+        <p:txBody>
+          <a:bodyPr/>
+          <a:lstStyle/>
+          <a:p>
+            <a:endParaRPr lang="ko-KR" altLang="en-US"/>
+          </a:p>
+        </p:txBody>
       </p:sp>
       <p:sp>
         <p:nvSpPr>
@@ -4281,6 +4578,13 @@
             <a:prstDash val="solid"/>
           </a:ln>
         </p:spPr>
+        <p:txBody>
+          <a:bodyPr/>
+          <a:lstStyle/>
+          <a:p>
+            <a:endParaRPr lang="ko-KR" altLang="en-US"/>
+          </a:p>
+        </p:txBody>
       </p:sp>
       <p:sp>
         <p:nvSpPr>
@@ -4306,6 +4610,13 @@
             <a:prstDash val="solid"/>
           </a:ln>
         </p:spPr>
+        <p:txBody>
+          <a:bodyPr/>
+          <a:lstStyle/>
+          <a:p>
+            <a:endParaRPr lang="ko-KR" altLang="en-US"/>
+          </a:p>
+        </p:txBody>
       </p:sp>
       <p:sp>
         <p:nvSpPr>
@@ -4331,6 +4642,13 @@
             <a:prstDash val="solid"/>
           </a:ln>
         </p:spPr>
+        <p:txBody>
+          <a:bodyPr/>
+          <a:lstStyle/>
+          <a:p>
+            <a:endParaRPr lang="ko-KR" altLang="en-US"/>
+          </a:p>
+        </p:txBody>
       </p:sp>
       <p:sp>
         <p:nvSpPr>
@@ -4356,6 +4674,13 @@
             <a:prstDash val="solid"/>
           </a:ln>
         </p:spPr>
+        <p:txBody>
+          <a:bodyPr/>
+          <a:lstStyle/>
+          <a:p>
+            <a:endParaRPr lang="ko-KR" altLang="en-US"/>
+          </a:p>
+        </p:txBody>
       </p:sp>
       <p:sp>
         <p:nvSpPr>
@@ -4385,6 +4710,13 @@
             <a:prstDash val="solid"/>
           </a:ln>
         </p:spPr>
+        <p:txBody>
+          <a:bodyPr/>
+          <a:lstStyle/>
+          <a:p>
+            <a:endParaRPr lang="ko-KR" altLang="en-US"/>
+          </a:p>
+        </p:txBody>
       </p:sp>
       <p:sp>
         <p:nvSpPr>
@@ -4640,6 +4972,13 @@
             <a:prstDash val="solid"/>
           </a:ln>
         </p:spPr>
+        <p:txBody>
+          <a:bodyPr/>
+          <a:lstStyle/>
+          <a:p>
+            <a:endParaRPr lang="ko-KR" altLang="en-US"/>
+          </a:p>
+        </p:txBody>
       </p:sp>
       <p:sp>
         <p:nvSpPr>
@@ -4752,6 +5091,13 @@
             </a:outerShdw>
           </a:effectLst>
         </p:spPr>
+        <p:txBody>
+          <a:bodyPr/>
+          <a:lstStyle/>
+          <a:p>
+            <a:endParaRPr lang="ko-KR" altLang="en-US"/>
+          </a:p>
+        </p:txBody>
       </p:sp>
       <p:sp>
         <p:nvSpPr>
@@ -4774,6 +5120,13 @@
           </a:solidFill>
           <a:ln/>
         </p:spPr>
+        <p:txBody>
+          <a:bodyPr/>
+          <a:lstStyle/>
+          <a:p>
+            <a:endParaRPr lang="ko-KR" altLang="en-US"/>
+          </a:p>
+        </p:txBody>
       </p:sp>
       <p:sp>
         <p:nvSpPr>
@@ -4794,6 +5147,13 @@
           </a:solidFill>
           <a:ln/>
         </p:spPr>
+        <p:txBody>
+          <a:bodyPr/>
+          <a:lstStyle/>
+          <a:p>
+            <a:endParaRPr lang="ko-KR" altLang="en-US"/>
+          </a:p>
+        </p:txBody>
       </p:sp>
       <p:sp>
         <p:nvSpPr>
@@ -4817,6 +5177,13 @@
             <a:prstDash val="solid"/>
           </a:ln>
         </p:spPr>
+        <p:txBody>
+          <a:bodyPr/>
+          <a:lstStyle/>
+          <a:p>
+            <a:endParaRPr lang="ko-KR" altLang="en-US"/>
+          </a:p>
+        </p:txBody>
       </p:sp>
       <p:sp>
         <p:nvSpPr>
@@ -4837,6 +5204,13 @@
           </a:solidFill>
           <a:ln/>
         </p:spPr>
+        <p:txBody>
+          <a:bodyPr/>
+          <a:lstStyle/>
+          <a:p>
+            <a:endParaRPr lang="ko-KR" altLang="en-US"/>
+          </a:p>
+        </p:txBody>
       </p:sp>
       <p:sp>
         <p:nvSpPr>
@@ -4857,6 +5231,13 @@
           </a:solidFill>
           <a:ln/>
         </p:spPr>
+        <p:txBody>
+          <a:bodyPr/>
+          <a:lstStyle/>
+          <a:p>
+            <a:endParaRPr lang="ko-KR" altLang="en-US"/>
+          </a:p>
+        </p:txBody>
       </p:sp>
       <p:sp>
         <p:nvSpPr>
@@ -4877,6 +5258,13 @@
           </a:solidFill>
           <a:ln/>
         </p:spPr>
+        <p:txBody>
+          <a:bodyPr/>
+          <a:lstStyle/>
+          <a:p>
+            <a:endParaRPr lang="ko-KR" altLang="en-US"/>
+          </a:p>
+        </p:txBody>
       </p:sp>
       <p:pic>
         <p:nvPicPr>
@@ -5078,7 +5466,7 @@
               <a:t> </a:t>
             </a:r>
             <a:r>
-              <a:rPr lang="en-US" sz="1550" dirty="0" err="1" smtClean="0">
+              <a:rPr lang="en-US" sz="1550" dirty="0" err="1">
                 <a:solidFill>
                   <a:srgbClr val="232F3E"/>
                 </a:solidFill>
@@ -5088,7 +5476,7 @@
               </a:rPr>
               <a:t>가능</a:t>
             </a:r>
-            <a:endParaRPr lang="en-US" sz="1550" dirty="0" smtClean="0">
+            <a:endParaRPr lang="en-US" sz="1550" dirty="0">
               <a:solidFill>
                 <a:srgbClr val="232F3E"/>
               </a:solidFill>
@@ -5269,6 +5657,13 @@
             <a:prstDash val="solid"/>
           </a:ln>
         </p:spPr>
+        <p:txBody>
+          <a:bodyPr/>
+          <a:lstStyle/>
+          <a:p>
+            <a:endParaRPr lang="ko-KR" altLang="en-US"/>
+          </a:p>
+        </p:txBody>
       </p:sp>
       <p:sp>
         <p:nvSpPr>
@@ -5374,6 +5769,13 @@
             </a:outerShdw>
           </a:effectLst>
         </p:spPr>
+        <p:txBody>
+          <a:bodyPr/>
+          <a:lstStyle/>
+          <a:p>
+            <a:endParaRPr lang="ko-KR" altLang="en-US"/>
+          </a:p>
+        </p:txBody>
       </p:sp>
       <p:sp>
         <p:nvSpPr>
@@ -5447,6 +5849,13 @@
             </a:outerShdw>
           </a:effectLst>
         </p:spPr>
+        <p:txBody>
+          <a:bodyPr/>
+          <a:lstStyle/>
+          <a:p>
+            <a:endParaRPr lang="ko-KR" altLang="en-US"/>
+          </a:p>
+        </p:txBody>
       </p:sp>
       <p:sp>
         <p:nvSpPr>
@@ -5469,6 +5878,13 @@
           </a:solidFill>
           <a:ln/>
         </p:spPr>
+        <p:txBody>
+          <a:bodyPr/>
+          <a:lstStyle/>
+          <a:p>
+            <a:endParaRPr lang="ko-KR" altLang="en-US"/>
+          </a:p>
+        </p:txBody>
       </p:sp>
       <p:sp>
         <p:nvSpPr>
@@ -5489,6 +5905,13 @@
           </a:solidFill>
           <a:ln/>
         </p:spPr>
+        <p:txBody>
+          <a:bodyPr/>
+          <a:lstStyle/>
+          <a:p>
+            <a:endParaRPr lang="ko-KR" altLang="en-US"/>
+          </a:p>
+        </p:txBody>
       </p:sp>
       <p:sp>
         <p:nvSpPr>
@@ -5512,6 +5935,13 @@
             <a:prstDash val="solid"/>
           </a:ln>
         </p:spPr>
+        <p:txBody>
+          <a:bodyPr/>
+          <a:lstStyle/>
+          <a:p>
+            <a:endParaRPr lang="ko-KR" altLang="en-US"/>
+          </a:p>
+        </p:txBody>
       </p:sp>
       <p:sp>
         <p:nvSpPr>
@@ -5532,6 +5962,13 @@
           </a:solidFill>
           <a:ln/>
         </p:spPr>
+        <p:txBody>
+          <a:bodyPr/>
+          <a:lstStyle/>
+          <a:p>
+            <a:endParaRPr lang="ko-KR" altLang="en-US"/>
+          </a:p>
+        </p:txBody>
       </p:sp>
       <p:sp>
         <p:nvSpPr>
@@ -5552,6 +5989,13 @@
           </a:solidFill>
           <a:ln/>
         </p:spPr>
+        <p:txBody>
+          <a:bodyPr/>
+          <a:lstStyle/>
+          <a:p>
+            <a:endParaRPr lang="ko-KR" altLang="en-US"/>
+          </a:p>
+        </p:txBody>
       </p:sp>
       <p:sp>
         <p:nvSpPr>
@@ -5572,6 +6016,13 @@
           </a:solidFill>
           <a:ln/>
         </p:spPr>
+        <p:txBody>
+          <a:bodyPr/>
+          <a:lstStyle/>
+          <a:p>
+            <a:endParaRPr lang="ko-KR" altLang="en-US"/>
+          </a:p>
+        </p:txBody>
       </p:sp>
       <p:pic>
         <p:nvPicPr>
@@ -5797,6 +6248,13 @@
             <a:prstDash val="solid"/>
           </a:ln>
         </p:spPr>
+        <p:txBody>
+          <a:bodyPr/>
+          <a:lstStyle/>
+          <a:p>
+            <a:endParaRPr lang="ko-KR" altLang="en-US"/>
+          </a:p>
+        </p:txBody>
       </p:sp>
       <p:sp>
         <p:nvSpPr>
@@ -5862,7 +6320,7 @@
               <a:buNone/>
             </a:pPr>
             <a:r>
-              <a:rPr lang="en-US" sz="2800" b="1" dirty="0" smtClean="0">
+              <a:rPr lang="en-US" sz="2800" b="1" dirty="0">
                 <a:solidFill>
                   <a:srgbClr val="232F3E"/>
                 </a:solidFill>
@@ -5870,18 +6328,7 @@
                 <a:ea typeface="맑은 고딕" pitchFamily="34" charset="-122"/>
                 <a:cs typeface="맑은 고딕" pitchFamily="34" charset="-120"/>
               </a:rPr>
-              <a:t> </a:t>
-            </a:r>
-            <a:r>
-              <a:rPr lang="en-US" sz="2800" b="1" dirty="0">
-                <a:solidFill>
-                  <a:srgbClr val="232F3E"/>
-                </a:solidFill>
-                <a:latin typeface="맑은 고딕" pitchFamily="34" charset="0"/>
-                <a:ea typeface="맑은 고딕" pitchFamily="34" charset="-122"/>
-                <a:cs typeface="맑은 고딕" pitchFamily="34" charset="-120"/>
-              </a:rPr>
-              <a:t>Creating an EC2 Instance</a:t>
+              <a:t> Creating an EC2 Instance</a:t>
             </a:r>
             <a:endParaRPr lang="en-US" sz="2800" dirty="0"/>
           </a:p>
@@ -5913,6 +6360,13 @@
             </a:outerShdw>
           </a:effectLst>
         </p:spPr>
+        <p:txBody>
+          <a:bodyPr/>
+          <a:lstStyle/>
+          <a:p>
+            <a:endParaRPr lang="ko-KR" altLang="en-US"/>
+          </a:p>
+        </p:txBody>
       </p:sp>
       <p:sp>
         <p:nvSpPr>
@@ -5986,6 +6440,13 @@
             </a:outerShdw>
           </a:effectLst>
         </p:spPr>
+        <p:txBody>
+          <a:bodyPr/>
+          <a:lstStyle/>
+          <a:p>
+            <a:endParaRPr lang="ko-KR" altLang="en-US"/>
+          </a:p>
+        </p:txBody>
       </p:sp>
       <p:sp>
         <p:nvSpPr>
@@ -6008,6 +6469,13 @@
           </a:solidFill>
           <a:ln/>
         </p:spPr>
+        <p:txBody>
+          <a:bodyPr/>
+          <a:lstStyle/>
+          <a:p>
+            <a:endParaRPr lang="ko-KR" altLang="en-US"/>
+          </a:p>
+        </p:txBody>
       </p:sp>
       <p:sp>
         <p:nvSpPr>
@@ -6028,6 +6496,13 @@
           </a:solidFill>
           <a:ln/>
         </p:spPr>
+        <p:txBody>
+          <a:bodyPr/>
+          <a:lstStyle/>
+          <a:p>
+            <a:endParaRPr lang="ko-KR" altLang="en-US"/>
+          </a:p>
+        </p:txBody>
       </p:sp>
       <p:sp>
         <p:nvSpPr>
@@ -6051,6 +6526,13 @@
             <a:prstDash val="solid"/>
           </a:ln>
         </p:spPr>
+        <p:txBody>
+          <a:bodyPr/>
+          <a:lstStyle/>
+          <a:p>
+            <a:endParaRPr lang="ko-KR" altLang="en-US"/>
+          </a:p>
+        </p:txBody>
       </p:sp>
       <p:sp>
         <p:nvSpPr>
@@ -6071,6 +6553,13 @@
           </a:solidFill>
           <a:ln/>
         </p:spPr>
+        <p:txBody>
+          <a:bodyPr/>
+          <a:lstStyle/>
+          <a:p>
+            <a:endParaRPr lang="ko-KR" altLang="en-US"/>
+          </a:p>
+        </p:txBody>
       </p:sp>
       <p:sp>
         <p:nvSpPr>
@@ -6091,6 +6580,13 @@
           </a:solidFill>
           <a:ln/>
         </p:spPr>
+        <p:txBody>
+          <a:bodyPr/>
+          <a:lstStyle/>
+          <a:p>
+            <a:endParaRPr lang="ko-KR" altLang="en-US"/>
+          </a:p>
+        </p:txBody>
       </p:sp>
       <p:sp>
         <p:nvSpPr>
@@ -6111,6 +6607,13 @@
           </a:solidFill>
           <a:ln/>
         </p:spPr>
+        <p:txBody>
+          <a:bodyPr/>
+          <a:lstStyle/>
+          <a:p>
+            <a:endParaRPr lang="ko-KR" altLang="en-US"/>
+          </a:p>
+        </p:txBody>
       </p:sp>
       <p:pic>
         <p:nvPicPr>
@@ -6175,7 +6678,7 @@
               <a:t>Amazon Machine Image (AMI) </a:t>
             </a:r>
             <a:r>
-              <a:rPr lang="en-US" sz="1300" b="1" dirty="0" err="1" smtClean="0">
+              <a:rPr lang="en-US" sz="1300" b="1" dirty="0" err="1">
                 <a:solidFill>
                   <a:srgbClr val="232F3E"/>
                 </a:solidFill>
@@ -6185,7 +6688,7 @@
               </a:rPr>
               <a:t>선택</a:t>
             </a:r>
-            <a:endParaRPr lang="en-US" sz="1300" b="1" dirty="0" smtClean="0">
+            <a:endParaRPr lang="en-US" sz="1300" b="1" dirty="0">
               <a:solidFill>
                 <a:srgbClr val="232F3E"/>
               </a:solidFill>
@@ -6201,12 +6704,8 @@
               </a:lnSpc>
             </a:pPr>
             <a:r>
-              <a:rPr lang="en-US" altLang="ko-KR" sz="1200" dirty="0" smtClean="0"/>
-              <a:t>(AMI </a:t>
-            </a:r>
-            <a:r>
               <a:rPr lang="en-US" altLang="ko-KR" sz="1200" dirty="0"/>
-              <a:t>= </a:t>
+              <a:t>(AMI = </a:t>
             </a:r>
             <a:r>
               <a:rPr lang="ko-KR" altLang="en-US" sz="1200" dirty="0"/>
@@ -6225,7 +6724,7 @@
               <a:t>세팅값</a:t>
             </a:r>
             <a:r>
-              <a:rPr lang="en-US" altLang="ko-KR" sz="1200" dirty="0" smtClean="0"/>
+              <a:rPr lang="en-US" altLang="ko-KR" sz="1200" dirty="0"/>
               <a:t>)</a:t>
             </a:r>
             <a:endParaRPr lang="en-US" sz="1200" dirty="0"/>
@@ -6258,6 +6757,13 @@
             </a:outerShdw>
           </a:effectLst>
         </p:spPr>
+        <p:txBody>
+          <a:bodyPr/>
+          <a:lstStyle/>
+          <a:p>
+            <a:endParaRPr lang="ko-KR" altLang="en-US"/>
+          </a:p>
+        </p:txBody>
       </p:sp>
       <p:sp>
         <p:nvSpPr>
@@ -6331,6 +6837,13 @@
             </a:outerShdw>
           </a:effectLst>
         </p:spPr>
+        <p:txBody>
+          <a:bodyPr/>
+          <a:lstStyle/>
+          <a:p>
+            <a:endParaRPr lang="ko-KR" altLang="en-US"/>
+          </a:p>
+        </p:txBody>
       </p:sp>
       <p:sp>
         <p:nvSpPr>
@@ -6353,6 +6866,13 @@
           </a:solidFill>
           <a:ln/>
         </p:spPr>
+        <p:txBody>
+          <a:bodyPr/>
+          <a:lstStyle/>
+          <a:p>
+            <a:endParaRPr lang="ko-KR" altLang="en-US"/>
+          </a:p>
+        </p:txBody>
       </p:sp>
       <p:sp>
         <p:nvSpPr>
@@ -6373,6 +6893,13 @@
           </a:solidFill>
           <a:ln/>
         </p:spPr>
+        <p:txBody>
+          <a:bodyPr/>
+          <a:lstStyle/>
+          <a:p>
+            <a:endParaRPr lang="ko-KR" altLang="en-US"/>
+          </a:p>
+        </p:txBody>
       </p:sp>
       <p:sp>
         <p:nvSpPr>
@@ -6396,6 +6923,13 @@
             <a:prstDash val="solid"/>
           </a:ln>
         </p:spPr>
+        <p:txBody>
+          <a:bodyPr/>
+          <a:lstStyle/>
+          <a:p>
+            <a:endParaRPr lang="ko-KR" altLang="en-US"/>
+          </a:p>
+        </p:txBody>
       </p:sp>
       <p:sp>
         <p:nvSpPr>
@@ -6416,6 +6950,13 @@
           </a:solidFill>
           <a:ln/>
         </p:spPr>
+        <p:txBody>
+          <a:bodyPr/>
+          <a:lstStyle/>
+          <a:p>
+            <a:endParaRPr lang="ko-KR" altLang="en-US"/>
+          </a:p>
+        </p:txBody>
       </p:sp>
       <p:sp>
         <p:nvSpPr>
@@ -6436,6 +6977,13 @@
           </a:solidFill>
           <a:ln/>
         </p:spPr>
+        <p:txBody>
+          <a:bodyPr/>
+          <a:lstStyle/>
+          <a:p>
+            <a:endParaRPr lang="ko-KR" altLang="en-US"/>
+          </a:p>
+        </p:txBody>
       </p:sp>
       <p:sp>
         <p:nvSpPr>
@@ -6456,6 +7004,13 @@
           </a:solidFill>
           <a:ln/>
         </p:spPr>
+        <p:txBody>
+          <a:bodyPr/>
+          <a:lstStyle/>
+          <a:p>
+            <a:endParaRPr lang="ko-KR" altLang="en-US"/>
+          </a:p>
+        </p:txBody>
       </p:sp>
       <p:pic>
         <p:nvPicPr>
@@ -6657,6 +7212,13 @@
             <a:prstDash val="solid"/>
           </a:ln>
         </p:spPr>
+        <p:txBody>
+          <a:bodyPr/>
+          <a:lstStyle/>
+          <a:p>
+            <a:endParaRPr lang="ko-KR" altLang="en-US"/>
+          </a:p>
+        </p:txBody>
       </p:sp>
       <p:sp>
         <p:nvSpPr>
@@ -6722,7 +7284,7 @@
               <a:buNone/>
             </a:pPr>
             <a:r>
-              <a:rPr lang="en-US" sz="2800" b="1" dirty="0" smtClean="0">
+              <a:rPr lang="en-US" sz="2800" b="1" dirty="0">
                 <a:solidFill>
                   <a:srgbClr val="232F3E"/>
                 </a:solidFill>
@@ -6730,18 +7292,7 @@
                 <a:ea typeface="맑은 고딕" pitchFamily="34" charset="-122"/>
                 <a:cs typeface="맑은 고딕" pitchFamily="34" charset="-120"/>
               </a:rPr>
-              <a:t>Creating </a:t>
-            </a:r>
-            <a:r>
-              <a:rPr lang="en-US" sz="2800" b="1" dirty="0">
-                <a:solidFill>
-                  <a:srgbClr val="232F3E"/>
-                </a:solidFill>
-                <a:latin typeface="맑은 고딕" pitchFamily="34" charset="0"/>
-                <a:ea typeface="맑은 고딕" pitchFamily="34" charset="-122"/>
-                <a:cs typeface="맑은 고딕" pitchFamily="34" charset="-120"/>
-              </a:rPr>
-              <a:t>an EC2 Instance</a:t>
+              <a:t>Creating an EC2 Instance</a:t>
             </a:r>
             <a:endParaRPr lang="en-US" sz="2800" dirty="0"/>
           </a:p>
@@ -6773,6 +7324,13 @@
             </a:outerShdw>
           </a:effectLst>
         </p:spPr>
+        <p:txBody>
+          <a:bodyPr/>
+          <a:lstStyle/>
+          <a:p>
+            <a:endParaRPr lang="ko-KR" altLang="en-US"/>
+          </a:p>
+        </p:txBody>
       </p:sp>
       <p:sp>
         <p:nvSpPr>
@@ -6846,6 +7404,13 @@
             </a:outerShdw>
           </a:effectLst>
         </p:spPr>
+        <p:txBody>
+          <a:bodyPr/>
+          <a:lstStyle/>
+          <a:p>
+            <a:endParaRPr lang="ko-KR" altLang="en-US"/>
+          </a:p>
+        </p:txBody>
       </p:sp>
       <p:sp>
         <p:nvSpPr>
@@ -6868,6 +7433,13 @@
           </a:solidFill>
           <a:ln/>
         </p:spPr>
+        <p:txBody>
+          <a:bodyPr/>
+          <a:lstStyle/>
+          <a:p>
+            <a:endParaRPr lang="ko-KR" altLang="en-US"/>
+          </a:p>
+        </p:txBody>
       </p:sp>
       <p:sp>
         <p:nvSpPr>
@@ -6888,6 +7460,13 @@
           </a:solidFill>
           <a:ln/>
         </p:spPr>
+        <p:txBody>
+          <a:bodyPr/>
+          <a:lstStyle/>
+          <a:p>
+            <a:endParaRPr lang="ko-KR" altLang="en-US"/>
+          </a:p>
+        </p:txBody>
       </p:sp>
       <p:sp>
         <p:nvSpPr>
@@ -6911,6 +7490,13 @@
             <a:prstDash val="solid"/>
           </a:ln>
         </p:spPr>
+        <p:txBody>
+          <a:bodyPr/>
+          <a:lstStyle/>
+          <a:p>
+            <a:endParaRPr lang="ko-KR" altLang="en-US"/>
+          </a:p>
+        </p:txBody>
       </p:sp>
       <p:sp>
         <p:nvSpPr>
@@ -6931,6 +7517,13 @@
           </a:solidFill>
           <a:ln/>
         </p:spPr>
+        <p:txBody>
+          <a:bodyPr/>
+          <a:lstStyle/>
+          <a:p>
+            <a:endParaRPr lang="ko-KR" altLang="en-US"/>
+          </a:p>
+        </p:txBody>
       </p:sp>
       <p:sp>
         <p:nvSpPr>
@@ -6951,6 +7544,13 @@
           </a:solidFill>
           <a:ln/>
         </p:spPr>
+        <p:txBody>
+          <a:bodyPr/>
+          <a:lstStyle/>
+          <a:p>
+            <a:endParaRPr lang="ko-KR" altLang="en-US"/>
+          </a:p>
+        </p:txBody>
       </p:sp>
       <p:sp>
         <p:nvSpPr>
@@ -6971,6 +7571,13 @@
           </a:solidFill>
           <a:ln/>
         </p:spPr>
+        <p:txBody>
+          <a:bodyPr/>
+          <a:lstStyle/>
+          <a:p>
+            <a:endParaRPr lang="ko-KR" altLang="en-US"/>
+          </a:p>
+        </p:txBody>
       </p:sp>
       <p:pic>
         <p:nvPicPr>
@@ -7027,12 +7634,8 @@
               <a:t>= </a:t>
             </a:r>
             <a:r>
-              <a:rPr lang="ko-KR" altLang="en-US" sz="1400" dirty="0" smtClean="0"/>
-              <a:t>하드웨어 </a:t>
-            </a:r>
-            <a:r>
               <a:rPr lang="ko-KR" altLang="en-US" sz="1400" dirty="0"/>
-              <a:t>사양</a:t>
+              <a:t>하드웨어 사양</a:t>
             </a:r>
             <a:r>
               <a:rPr lang="en-US" altLang="ko-KR" sz="1400" dirty="0"/>
@@ -7048,13 +7651,9 @@
             </a:r>
             <a:r>
               <a:rPr lang="ko-KR" altLang="en-US" sz="1400" dirty="0"/>
-              <a:t>을 미리 정해놓은 </a:t>
-            </a:r>
-            <a:r>
-              <a:rPr lang="ko-KR" altLang="en-US" sz="1400" dirty="0" smtClean="0"/>
-              <a:t>규격</a:t>
-            </a:r>
-            <a:endParaRPr lang="en-US" altLang="ko-KR" sz="1400" dirty="0" smtClean="0"/>
+              <a:t>을 미리 정해놓은 규격</a:t>
+            </a:r>
+            <a:endParaRPr lang="en-US" altLang="ko-KR" sz="1400" dirty="0"/>
           </a:p>
         </p:txBody>
       </p:sp>
@@ -7084,6 +7683,13 @@
             <a:prstDash val="solid"/>
           </a:ln>
         </p:spPr>
+        <p:txBody>
+          <a:bodyPr/>
+          <a:lstStyle/>
+          <a:p>
+            <a:endParaRPr lang="ko-KR" altLang="en-US"/>
+          </a:p>
+        </p:txBody>
       </p:sp>
       <p:sp>
         <p:nvSpPr>
@@ -7150,6 +7756,13 @@
             <a:prstDash val="solid"/>
           </a:ln>
         </p:spPr>
+        <p:txBody>
+          <a:bodyPr/>
+          <a:lstStyle/>
+          <a:p>
+            <a:endParaRPr lang="ko-KR" altLang="en-US"/>
+          </a:p>
+        </p:txBody>
       </p:sp>
       <p:sp>
         <p:nvSpPr>
@@ -7184,29 +7797,7 @@
                 <a:ea typeface="맑은 고딕" pitchFamily="34" charset="-122"/>
                 <a:cs typeface="맑은 고딕" pitchFamily="34" charset="-120"/>
               </a:rPr>
-              <a:t>micro · vCPU </a:t>
-            </a:r>
-            <a:r>
-              <a:rPr lang="en-US" sz="1000" dirty="0" smtClean="0">
-                <a:solidFill>
-                  <a:srgbClr val="232F3E"/>
-                </a:solidFill>
-                <a:latin typeface="맑은 고딕" pitchFamily="34" charset="0"/>
-                <a:ea typeface="맑은 고딕" pitchFamily="34" charset="-122"/>
-                <a:cs typeface="맑은 고딕" pitchFamily="34" charset="-120"/>
-              </a:rPr>
-              <a:t>2 </a:t>
-            </a:r>
-            <a:r>
-              <a:rPr lang="en-US" sz="1000" dirty="0">
-                <a:solidFill>
-                  <a:srgbClr val="232F3E"/>
-                </a:solidFill>
-                <a:latin typeface="맑은 고딕" pitchFamily="34" charset="0"/>
-                <a:ea typeface="맑은 고딕" pitchFamily="34" charset="-122"/>
-                <a:cs typeface="맑은 고딕" pitchFamily="34" charset="-120"/>
-              </a:rPr>
-              <a:t>· RAM 1GiB</a:t>
+              <a:t>micro · vCPU 2 · RAM 1GiB</a:t>
             </a:r>
             <a:endParaRPr lang="en-US" sz="1000" dirty="0"/>
           </a:p>
@@ -7238,6 +7829,13 @@
             <a:prstDash val="solid"/>
           </a:ln>
         </p:spPr>
+        <p:txBody>
+          <a:bodyPr/>
+          <a:lstStyle/>
+          <a:p>
+            <a:endParaRPr lang="ko-KR" altLang="en-US"/>
+          </a:p>
+        </p:txBody>
       </p:sp>
       <p:sp>
         <p:nvSpPr>
@@ -7500,6 +8098,13 @@
             </a:outerShdw>
           </a:effectLst>
         </p:spPr>
+        <p:txBody>
+          <a:bodyPr/>
+          <a:lstStyle/>
+          <a:p>
+            <a:endParaRPr lang="ko-KR" altLang="en-US"/>
+          </a:p>
+        </p:txBody>
       </p:sp>
       <p:sp>
         <p:nvSpPr>
@@ -7522,6 +8127,13 @@
           </a:solidFill>
           <a:ln/>
         </p:spPr>
+        <p:txBody>
+          <a:bodyPr/>
+          <a:lstStyle/>
+          <a:p>
+            <a:endParaRPr lang="ko-KR" altLang="en-US"/>
+          </a:p>
+        </p:txBody>
       </p:sp>
       <p:sp>
         <p:nvSpPr>
@@ -7542,6 +8154,13 @@
           </a:solidFill>
           <a:ln/>
         </p:spPr>
+        <p:txBody>
+          <a:bodyPr/>
+          <a:lstStyle/>
+          <a:p>
+            <a:endParaRPr lang="ko-KR" altLang="en-US"/>
+          </a:p>
+        </p:txBody>
       </p:sp>
       <p:sp>
         <p:nvSpPr>
@@ -7565,6 +8184,13 @@
             <a:prstDash val="solid"/>
           </a:ln>
         </p:spPr>
+        <p:txBody>
+          <a:bodyPr/>
+          <a:lstStyle/>
+          <a:p>
+            <a:endParaRPr lang="ko-KR" altLang="en-US"/>
+          </a:p>
+        </p:txBody>
       </p:sp>
       <p:sp>
         <p:nvSpPr>
@@ -7585,6 +8211,13 @@
           </a:solidFill>
           <a:ln/>
         </p:spPr>
+        <p:txBody>
+          <a:bodyPr/>
+          <a:lstStyle/>
+          <a:p>
+            <a:endParaRPr lang="ko-KR" altLang="en-US"/>
+          </a:p>
+        </p:txBody>
       </p:sp>
       <p:sp>
         <p:nvSpPr>
@@ -7605,6 +8238,13 @@
           </a:solidFill>
           <a:ln/>
         </p:spPr>
+        <p:txBody>
+          <a:bodyPr/>
+          <a:lstStyle/>
+          <a:p>
+            <a:endParaRPr lang="ko-KR" altLang="en-US"/>
+          </a:p>
+        </p:txBody>
       </p:sp>
       <p:sp>
         <p:nvSpPr>
@@ -7625,6 +8265,13 @@
           </a:solidFill>
           <a:ln/>
         </p:spPr>
+        <p:txBody>
+          <a:bodyPr/>
+          <a:lstStyle/>
+          <a:p>
+            <a:endParaRPr lang="ko-KR" altLang="en-US"/>
+          </a:p>
+        </p:txBody>
       </p:sp>
       <p:pic>
         <p:nvPicPr>
@@ -7715,6 +8362,13 @@
             <a:prstDash val="solid"/>
           </a:ln>
         </p:spPr>
+        <p:txBody>
+          <a:bodyPr/>
+          <a:lstStyle/>
+          <a:p>
+            <a:endParaRPr lang="ko-KR" altLang="en-US"/>
+          </a:p>
+        </p:txBody>
       </p:sp>
       <p:sp>
         <p:nvSpPr>
@@ -7827,6 +8481,13 @@
             </a:outerShdw>
           </a:effectLst>
         </p:spPr>
+        <p:txBody>
+          <a:bodyPr/>
+          <a:lstStyle/>
+          <a:p>
+            <a:endParaRPr lang="ko-KR" altLang="en-US"/>
+          </a:p>
+        </p:txBody>
       </p:sp>
       <p:sp>
         <p:nvSpPr>
@@ -7849,6 +8510,13 @@
           </a:solidFill>
           <a:ln/>
         </p:spPr>
+        <p:txBody>
+          <a:bodyPr/>
+          <a:lstStyle/>
+          <a:p>
+            <a:endParaRPr lang="ko-KR" altLang="en-US"/>
+          </a:p>
+        </p:txBody>
       </p:sp>
       <p:sp>
         <p:nvSpPr>
@@ -7869,6 +8537,13 @@
           </a:solidFill>
           <a:ln/>
         </p:spPr>
+        <p:txBody>
+          <a:bodyPr/>
+          <a:lstStyle/>
+          <a:p>
+            <a:endParaRPr lang="ko-KR" altLang="en-US"/>
+          </a:p>
+        </p:txBody>
       </p:sp>
       <p:sp>
         <p:nvSpPr>
@@ -7892,6 +8567,13 @@
             <a:prstDash val="solid"/>
           </a:ln>
         </p:spPr>
+        <p:txBody>
+          <a:bodyPr/>
+          <a:lstStyle/>
+          <a:p>
+            <a:endParaRPr lang="ko-KR" altLang="en-US"/>
+          </a:p>
+        </p:txBody>
       </p:sp>
       <p:sp>
         <p:nvSpPr>
@@ -7912,6 +8594,13 @@
           </a:solidFill>
           <a:ln/>
         </p:spPr>
+        <p:txBody>
+          <a:bodyPr/>
+          <a:lstStyle/>
+          <a:p>
+            <a:endParaRPr lang="ko-KR" altLang="en-US"/>
+          </a:p>
+        </p:txBody>
       </p:sp>
       <p:sp>
         <p:nvSpPr>
@@ -7932,6 +8621,13 @@
           </a:solidFill>
           <a:ln/>
         </p:spPr>
+        <p:txBody>
+          <a:bodyPr/>
+          <a:lstStyle/>
+          <a:p>
+            <a:endParaRPr lang="ko-KR" altLang="en-US"/>
+          </a:p>
+        </p:txBody>
       </p:sp>
       <p:sp>
         <p:nvSpPr>
@@ -7952,6 +8648,13 @@
           </a:solidFill>
           <a:ln/>
         </p:spPr>
+        <p:txBody>
+          <a:bodyPr/>
+          <a:lstStyle/>
+          <a:p>
+            <a:endParaRPr lang="ko-KR" altLang="en-US"/>
+          </a:p>
+        </p:txBody>
       </p:sp>
       <p:pic>
         <p:nvPicPr>
@@ -8129,7 +8832,7 @@
               <a:t> </a:t>
             </a:r>
             <a:r>
-              <a:rPr lang="en-US" sz="1150" dirty="0" err="1" smtClean="0">
+              <a:rPr lang="en-US" sz="1150" dirty="0" err="1">
                 <a:solidFill>
                   <a:srgbClr val="232F3E"/>
                 </a:solidFill>
@@ -8140,7 +8843,7 @@
               <a:t>배치</a:t>
             </a:r>
             <a:r>
-              <a:rPr lang="en-US" sz="1150" dirty="0" smtClean="0">
+              <a:rPr lang="en-US" sz="1150" dirty="0">
                 <a:solidFill>
                   <a:srgbClr val="232F3E"/>
                 </a:solidFill>
@@ -8164,13 +8867,9 @@
             </a:r>
             <a:r>
               <a:rPr lang="ko-KR" altLang="en-US" sz="1200" dirty="0"/>
-              <a:t>개에만 </a:t>
-            </a:r>
-            <a:r>
-              <a:rPr lang="ko-KR" altLang="en-US" sz="1200" dirty="0" smtClean="0"/>
-              <a:t>속함</a:t>
-            </a:r>
-            <a:endParaRPr lang="en-US" sz="1150" dirty="0" smtClean="0">
+              <a:t>개에만 속함</a:t>
+            </a:r>
+            <a:endParaRPr lang="en-US" sz="1150" dirty="0">
               <a:solidFill>
                 <a:srgbClr val="232F3E"/>
               </a:solidFill>
@@ -8191,7 +8890,7 @@
               <a:buChar char="●"/>
             </a:pPr>
             <a:r>
-              <a:rPr lang="en-US" sz="1150" dirty="0" smtClean="0">
+              <a:rPr lang="en-US" sz="1150" dirty="0">
                 <a:solidFill>
                   <a:srgbClr val="232F3E"/>
                 </a:solidFill>
@@ -8342,6 +9041,13 @@
             <a:prstDash val="solid"/>
           </a:ln>
         </p:spPr>
+        <p:txBody>
+          <a:bodyPr/>
+          <a:lstStyle/>
+          <a:p>
+            <a:endParaRPr lang="ko-KR" altLang="en-US"/>
+          </a:p>
+        </p:txBody>
       </p:sp>
       <p:sp>
         <p:nvSpPr>
@@ -8441,6 +9147,13 @@
             <a:prstDash val="solid"/>
           </a:ln>
         </p:spPr>
+        <p:txBody>
+          <a:bodyPr/>
+          <a:lstStyle/>
+          <a:p>
+            <a:endParaRPr lang="ko-KR" altLang="en-US"/>
+          </a:p>
+        </p:txBody>
       </p:sp>
       <p:sp>
         <p:nvSpPr>
@@ -8506,7 +9219,7 @@
               <a:buNone/>
             </a:pPr>
             <a:r>
-              <a:rPr lang="en-US" sz="2800" b="1" dirty="0" smtClean="0">
+              <a:rPr lang="en-US" sz="2800" b="1" dirty="0">
                 <a:solidFill>
                   <a:srgbClr val="232F3E"/>
                 </a:solidFill>
@@ -8514,18 +9227,7 @@
                 <a:ea typeface="맑은 고딕" pitchFamily="34" charset="-122"/>
                 <a:cs typeface="맑은 고딕" pitchFamily="34" charset="-120"/>
               </a:rPr>
-              <a:t>Network </a:t>
-            </a:r>
-            <a:r>
-              <a:rPr lang="en-US" sz="2800" b="1" dirty="0">
-                <a:solidFill>
-                  <a:srgbClr val="232F3E"/>
-                </a:solidFill>
-                <a:latin typeface="맑은 고딕" pitchFamily="34" charset="0"/>
-                <a:ea typeface="맑은 고딕" pitchFamily="34" charset="-122"/>
-                <a:cs typeface="맑은 고딕" pitchFamily="34" charset="-120"/>
-              </a:rPr>
-              <a:t>Settings 구성</a:t>
+              <a:t>Network Settings 구성</a:t>
             </a:r>
             <a:endParaRPr lang="en-US" sz="2800" dirty="0"/>
           </a:p>
@@ -8557,6 +9259,13 @@
             </a:outerShdw>
           </a:effectLst>
         </p:spPr>
+        <p:txBody>
+          <a:bodyPr/>
+          <a:lstStyle/>
+          <a:p>
+            <a:endParaRPr lang="ko-KR" altLang="en-US"/>
+          </a:p>
+        </p:txBody>
       </p:sp>
       <p:sp>
         <p:nvSpPr>
@@ -8630,6 +9339,13 @@
             </a:outerShdw>
           </a:effectLst>
         </p:spPr>
+        <p:txBody>
+          <a:bodyPr/>
+          <a:lstStyle/>
+          <a:p>
+            <a:endParaRPr lang="ko-KR" altLang="en-US"/>
+          </a:p>
+        </p:txBody>
       </p:sp>
       <p:sp>
         <p:nvSpPr>
@@ -8652,6 +9368,13 @@
           </a:solidFill>
           <a:ln/>
         </p:spPr>
+        <p:txBody>
+          <a:bodyPr/>
+          <a:lstStyle/>
+          <a:p>
+            <a:endParaRPr lang="ko-KR" altLang="en-US"/>
+          </a:p>
+        </p:txBody>
       </p:sp>
       <p:sp>
         <p:nvSpPr>
@@ -8672,6 +9395,13 @@
           </a:solidFill>
           <a:ln/>
         </p:spPr>
+        <p:txBody>
+          <a:bodyPr/>
+          <a:lstStyle/>
+          <a:p>
+            <a:endParaRPr lang="ko-KR" altLang="en-US"/>
+          </a:p>
+        </p:txBody>
       </p:sp>
       <p:sp>
         <p:nvSpPr>
@@ -8695,6 +9425,13 @@
             <a:prstDash val="solid"/>
           </a:ln>
         </p:spPr>
+        <p:txBody>
+          <a:bodyPr/>
+          <a:lstStyle/>
+          <a:p>
+            <a:endParaRPr lang="ko-KR" altLang="en-US"/>
+          </a:p>
+        </p:txBody>
       </p:sp>
       <p:sp>
         <p:nvSpPr>
@@ -8715,6 +9452,13 @@
           </a:solidFill>
           <a:ln/>
         </p:spPr>
+        <p:txBody>
+          <a:bodyPr/>
+          <a:lstStyle/>
+          <a:p>
+            <a:endParaRPr lang="ko-KR" altLang="en-US"/>
+          </a:p>
+        </p:txBody>
       </p:sp>
       <p:sp>
         <p:nvSpPr>
@@ -8735,6 +9479,13 @@
           </a:solidFill>
           <a:ln/>
         </p:spPr>
+        <p:txBody>
+          <a:bodyPr/>
+          <a:lstStyle/>
+          <a:p>
+            <a:endParaRPr lang="ko-KR" altLang="en-US"/>
+          </a:p>
+        </p:txBody>
       </p:sp>
       <p:sp>
         <p:nvSpPr>
@@ -8755,6 +9506,13 @@
           </a:solidFill>
           <a:ln/>
         </p:spPr>
+        <p:txBody>
+          <a:bodyPr/>
+          <a:lstStyle/>
+          <a:p>
+            <a:endParaRPr lang="ko-KR" altLang="en-US"/>
+          </a:p>
+        </p:txBody>
       </p:sp>
       <p:pic>
         <p:nvPicPr>
@@ -8838,7 +9596,7 @@
               <a:t> </a:t>
             </a:r>
             <a:r>
-              <a:rPr lang="en-US" sz="1200" dirty="0" err="1" smtClean="0">
+              <a:rPr lang="en-US" sz="1200" dirty="0" err="1">
                 <a:solidFill>
                   <a:srgbClr val="5C6B7A"/>
                 </a:solidFill>
@@ -8849,7 +9607,7 @@
               <a:t>허용</a:t>
             </a:r>
             <a:r>
-              <a:rPr lang="en-US" sz="1200" dirty="0" smtClean="0">
+              <a:rPr lang="en-US" sz="1200" dirty="0">
                 <a:solidFill>
                   <a:srgbClr val="5C6B7A"/>
                 </a:solidFill>
@@ -8860,7 +9618,7 @@
               <a:t> </a:t>
             </a:r>
             <a:r>
-              <a:rPr lang="ko-KR" altLang="en-US" sz="1200" dirty="0" smtClean="0">
+              <a:rPr lang="ko-KR" altLang="en-US" sz="1200" dirty="0">
                 <a:solidFill>
                   <a:srgbClr val="5C6B7A"/>
                 </a:solidFill>
@@ -9093,6 +9851,13 @@
             <a:prstDash val="solid"/>
           </a:ln>
         </p:spPr>
+        <p:txBody>
+          <a:bodyPr/>
+          <a:lstStyle/>
+          <a:p>
+            <a:endParaRPr lang="ko-KR" altLang="en-US"/>
+          </a:p>
+        </p:txBody>
       </p:sp>
       <p:sp>
         <p:nvSpPr>
@@ -9198,6 +9963,13 @@
             </a:outerShdw>
           </a:effectLst>
         </p:spPr>
+        <p:txBody>
+          <a:bodyPr/>
+          <a:lstStyle/>
+          <a:p>
+            <a:endParaRPr lang="ko-KR" altLang="en-US"/>
+          </a:p>
+        </p:txBody>
       </p:sp>
       <p:sp>
         <p:nvSpPr>
@@ -9271,6 +10043,13 @@
             </a:outerShdw>
           </a:effectLst>
         </p:spPr>
+        <p:txBody>
+          <a:bodyPr/>
+          <a:lstStyle/>
+          <a:p>
+            <a:endParaRPr lang="ko-KR" altLang="en-US"/>
+          </a:p>
+        </p:txBody>
       </p:sp>
       <p:sp>
         <p:nvSpPr>
@@ -9293,6 +10072,13 @@
           </a:solidFill>
           <a:ln/>
         </p:spPr>
+        <p:txBody>
+          <a:bodyPr/>
+          <a:lstStyle/>
+          <a:p>
+            <a:endParaRPr lang="ko-KR" altLang="en-US"/>
+          </a:p>
+        </p:txBody>
       </p:sp>
       <p:sp>
         <p:nvSpPr>
@@ -9313,6 +10099,13 @@
           </a:solidFill>
           <a:ln/>
         </p:spPr>
+        <p:txBody>
+          <a:bodyPr/>
+          <a:lstStyle/>
+          <a:p>
+            <a:endParaRPr lang="ko-KR" altLang="en-US"/>
+          </a:p>
+        </p:txBody>
       </p:sp>
       <p:sp>
         <p:nvSpPr>
@@ -9336,6 +10129,13 @@
             <a:prstDash val="solid"/>
           </a:ln>
         </p:spPr>
+        <p:txBody>
+          <a:bodyPr/>
+          <a:lstStyle/>
+          <a:p>
+            <a:endParaRPr lang="ko-KR" altLang="en-US"/>
+          </a:p>
+        </p:txBody>
       </p:sp>
       <p:sp>
         <p:nvSpPr>
@@ -9356,6 +10156,13 @@
           </a:solidFill>
           <a:ln/>
         </p:spPr>
+        <p:txBody>
+          <a:bodyPr/>
+          <a:lstStyle/>
+          <a:p>
+            <a:endParaRPr lang="ko-KR" altLang="en-US"/>
+          </a:p>
+        </p:txBody>
       </p:sp>
       <p:sp>
         <p:nvSpPr>
@@ -9376,6 +10183,13 @@
           </a:solidFill>
           <a:ln/>
         </p:spPr>
+        <p:txBody>
+          <a:bodyPr/>
+          <a:lstStyle/>
+          <a:p>
+            <a:endParaRPr lang="ko-KR" altLang="en-US"/>
+          </a:p>
+        </p:txBody>
       </p:sp>
       <p:sp>
         <p:nvSpPr>
@@ -9396,6 +10210,13 @@
           </a:solidFill>
           <a:ln/>
         </p:spPr>
+        <p:txBody>
+          <a:bodyPr/>
+          <a:lstStyle/>
+          <a:p>
+            <a:endParaRPr lang="ko-KR" altLang="en-US"/>
+          </a:p>
+        </p:txBody>
       </p:sp>
       <p:pic>
         <p:nvPicPr>
@@ -9486,6 +10307,13 @@
             <a:prstDash val="solid"/>
           </a:ln>
         </p:spPr>
+        <p:txBody>
+          <a:bodyPr/>
+          <a:lstStyle/>
+          <a:p>
+            <a:endParaRPr lang="ko-KR" altLang="en-US"/>
+          </a:p>
+        </p:txBody>
       </p:sp>
       <p:sp>
         <p:nvSpPr>
@@ -9508,6 +10336,13 @@
           </a:solidFill>
           <a:ln/>
         </p:spPr>
+        <p:txBody>
+          <a:bodyPr/>
+          <a:lstStyle/>
+          <a:p>
+            <a:endParaRPr lang="ko-KR" altLang="en-US"/>
+          </a:p>
+        </p:txBody>
       </p:sp>
       <p:sp>
         <p:nvSpPr>
@@ -9694,7 +10529,7 @@
           <a:p>
             <a:pPr algn="ctr"/>
             <a:r>
-              <a:rPr lang="en-US" sz="1400" dirty="0" smtClean="0"/>
+              <a:rPr lang="en-US" sz="1400" dirty="0"/>
               <a:t>gp3: </a:t>
             </a:r>
             <a:r>
@@ -9772,6 +10607,13 @@
             <a:prstDash val="solid"/>
           </a:ln>
         </p:spPr>
+        <p:txBody>
+          <a:bodyPr/>
+          <a:lstStyle/>
+          <a:p>
+            <a:endParaRPr lang="ko-KR" altLang="en-US"/>
+          </a:p>
+        </p:txBody>
       </p:sp>
       <p:sp>
         <p:nvSpPr>
@@ -9877,6 +10719,13 @@
             </a:outerShdw>
           </a:effectLst>
         </p:spPr>
+        <p:txBody>
+          <a:bodyPr/>
+          <a:lstStyle/>
+          <a:p>
+            <a:endParaRPr lang="ko-KR" altLang="en-US"/>
+          </a:p>
+        </p:txBody>
       </p:sp>
       <p:sp>
         <p:nvSpPr>
@@ -9950,6 +10799,13 @@
             </a:outerShdw>
           </a:effectLst>
         </p:spPr>
+        <p:txBody>
+          <a:bodyPr/>
+          <a:lstStyle/>
+          <a:p>
+            <a:endParaRPr lang="ko-KR" altLang="en-US"/>
+          </a:p>
+        </p:txBody>
       </p:sp>
       <p:sp>
         <p:nvSpPr>
@@ -9972,6 +10828,13 @@
           </a:solidFill>
           <a:ln/>
         </p:spPr>
+        <p:txBody>
+          <a:bodyPr/>
+          <a:lstStyle/>
+          <a:p>
+            <a:endParaRPr lang="ko-KR" altLang="en-US"/>
+          </a:p>
+        </p:txBody>
       </p:sp>
       <p:sp>
         <p:nvSpPr>
@@ -9992,6 +10855,13 @@
           </a:solidFill>
           <a:ln/>
         </p:spPr>
+        <p:txBody>
+          <a:bodyPr/>
+          <a:lstStyle/>
+          <a:p>
+            <a:endParaRPr lang="ko-KR" altLang="en-US"/>
+          </a:p>
+        </p:txBody>
       </p:sp>
       <p:sp>
         <p:nvSpPr>
@@ -10015,6 +10885,13 @@
             <a:prstDash val="solid"/>
           </a:ln>
         </p:spPr>
+        <p:txBody>
+          <a:bodyPr/>
+          <a:lstStyle/>
+          <a:p>
+            <a:endParaRPr lang="ko-KR" altLang="en-US"/>
+          </a:p>
+        </p:txBody>
       </p:sp>
       <p:sp>
         <p:nvSpPr>
@@ -10035,6 +10912,13 @@
           </a:solidFill>
           <a:ln/>
         </p:spPr>
+        <p:txBody>
+          <a:bodyPr/>
+          <a:lstStyle/>
+          <a:p>
+            <a:endParaRPr lang="ko-KR" altLang="en-US"/>
+          </a:p>
+        </p:txBody>
       </p:sp>
       <p:sp>
         <p:nvSpPr>
@@ -10055,6 +10939,13 @@
           </a:solidFill>
           <a:ln/>
         </p:spPr>
+        <p:txBody>
+          <a:bodyPr/>
+          <a:lstStyle/>
+          <a:p>
+            <a:endParaRPr lang="ko-KR" altLang="en-US"/>
+          </a:p>
+        </p:txBody>
       </p:sp>
       <p:sp>
         <p:nvSpPr>
@@ -10075,6 +10966,13 @@
           </a:solidFill>
           <a:ln/>
         </p:spPr>
+        <p:txBody>
+          <a:bodyPr/>
+          <a:lstStyle/>
+          <a:p>
+            <a:endParaRPr lang="ko-KR" altLang="en-US"/>
+          </a:p>
+        </p:txBody>
       </p:sp>
       <p:pic>
         <p:nvPicPr>
@@ -10527,7 +11425,7 @@
               <a:defRPr/>
             </a:pPr>
             <a:r>
-              <a:rPr kumimoji="0" lang="en-US" sz="900" b="0" i="0" u="none" strike="noStrike" kern="1200" cap="none" spc="0" normalizeH="0" baseline="0" noProof="0" dirty="0" smtClean="0">
+              <a:rPr kumimoji="0" lang="en-US" sz="900" b="0" i="0" u="none" strike="noStrike" kern="1200" cap="none" spc="0" normalizeH="0" baseline="0" noProof="0" dirty="0">
                 <a:ln>
                   <a:noFill/>
                 </a:ln>
@@ -10588,6 +11486,13 @@
             <a:prstDash val="solid"/>
           </a:ln>
         </p:spPr>
+        <p:txBody>
+          <a:bodyPr/>
+          <a:lstStyle/>
+          <a:p>
+            <a:endParaRPr lang="ko-KR" altLang="en-US"/>
+          </a:p>
+        </p:txBody>
       </p:sp>
       <p:sp>
         <p:nvSpPr>
@@ -10622,18 +11527,7 @@
                 <a:ea typeface="맑은 고딕" pitchFamily="34" charset="-122"/>
                 <a:cs typeface="맑은 고딕" pitchFamily="34" charset="-120"/>
               </a:rPr>
-              <a:t>PART </a:t>
-            </a:r>
-            <a:r>
-              <a:rPr lang="en-US" sz="1100" b="1" kern="0" spc="100" dirty="0" smtClean="0">
-                <a:solidFill>
-                  <a:srgbClr val="FF9900"/>
-                </a:solidFill>
-                <a:latin typeface="맑은 고딕" pitchFamily="34" charset="0"/>
-                <a:ea typeface="맑은 고딕" pitchFamily="34" charset="-122"/>
-                <a:cs typeface="맑은 고딕" pitchFamily="34" charset="-120"/>
-              </a:rPr>
-              <a:t>2</a:t>
+              <a:t>PART 2</a:t>
             </a:r>
             <a:endParaRPr lang="en-US" sz="1100" dirty="0"/>
           </a:p>
@@ -10703,6 +11597,13 @@
             <a:prstDash val="solid"/>
           </a:ln>
         </p:spPr>
+        <p:txBody>
+          <a:bodyPr/>
+          <a:lstStyle/>
+          <a:p>
+            <a:endParaRPr lang="ko-KR" altLang="en-US"/>
+          </a:p>
+        </p:txBody>
       </p:sp>
       <p:sp>
         <p:nvSpPr>
@@ -10815,6 +11716,13 @@
             </a:outerShdw>
           </a:effectLst>
         </p:spPr>
+        <p:txBody>
+          <a:bodyPr/>
+          <a:lstStyle/>
+          <a:p>
+            <a:endParaRPr lang="ko-KR" altLang="en-US"/>
+          </a:p>
+        </p:txBody>
       </p:sp>
       <p:sp>
         <p:nvSpPr>
@@ -10837,6 +11745,13 @@
           </a:solidFill>
           <a:ln/>
         </p:spPr>
+        <p:txBody>
+          <a:bodyPr/>
+          <a:lstStyle/>
+          <a:p>
+            <a:endParaRPr lang="ko-KR" altLang="en-US"/>
+          </a:p>
+        </p:txBody>
       </p:sp>
       <p:sp>
         <p:nvSpPr>
@@ -10857,6 +11772,13 @@
           </a:solidFill>
           <a:ln/>
         </p:spPr>
+        <p:txBody>
+          <a:bodyPr/>
+          <a:lstStyle/>
+          <a:p>
+            <a:endParaRPr lang="ko-KR" altLang="en-US"/>
+          </a:p>
+        </p:txBody>
       </p:sp>
       <p:sp>
         <p:nvSpPr>
@@ -10880,6 +11802,13 @@
             <a:prstDash val="solid"/>
           </a:ln>
         </p:spPr>
+        <p:txBody>
+          <a:bodyPr/>
+          <a:lstStyle/>
+          <a:p>
+            <a:endParaRPr lang="ko-KR" altLang="en-US"/>
+          </a:p>
+        </p:txBody>
       </p:sp>
       <p:sp>
         <p:nvSpPr>
@@ -10900,6 +11829,13 @@
           </a:solidFill>
           <a:ln/>
         </p:spPr>
+        <p:txBody>
+          <a:bodyPr/>
+          <a:lstStyle/>
+          <a:p>
+            <a:endParaRPr lang="ko-KR" altLang="en-US"/>
+          </a:p>
+        </p:txBody>
       </p:sp>
       <p:sp>
         <p:nvSpPr>
@@ -10920,6 +11856,13 @@
           </a:solidFill>
           <a:ln/>
         </p:spPr>
+        <p:txBody>
+          <a:bodyPr/>
+          <a:lstStyle/>
+          <a:p>
+            <a:endParaRPr lang="ko-KR" altLang="en-US"/>
+          </a:p>
+        </p:txBody>
       </p:sp>
       <p:sp>
         <p:nvSpPr>
@@ -10940,6 +11883,13 @@
           </a:solidFill>
           <a:ln/>
         </p:spPr>
+        <p:txBody>
+          <a:bodyPr/>
+          <a:lstStyle/>
+          <a:p>
+            <a:endParaRPr lang="ko-KR" altLang="en-US"/>
+          </a:p>
+        </p:txBody>
       </p:sp>
       <p:pic>
         <p:nvPicPr>
@@ -11001,7 +11951,7 @@
               <a:t>생성된 인스턴스 목록에서 상태(Instance state)가 </a:t>
             </a:r>
             <a:r>
-              <a:rPr lang="ko-KR" altLang="en-US" sz="1300" dirty="0" err="1" smtClean="0">
+              <a:rPr lang="ko-KR" altLang="en-US" sz="1300" dirty="0" err="1">
                 <a:solidFill>
                   <a:srgbClr val="5C6B7A"/>
                 </a:solidFill>
@@ -11012,7 +11962,7 @@
               <a:t>실행중</a:t>
             </a:r>
             <a:r>
-              <a:rPr lang="en-US" altLang="ko-KR" sz="1300" dirty="0" smtClean="0">
+              <a:rPr lang="en-US" altLang="ko-KR" sz="1300" dirty="0">
                 <a:solidFill>
                   <a:srgbClr val="5C6B7A"/>
                 </a:solidFill>
@@ -11023,7 +11973,7 @@
               <a:t>(</a:t>
             </a:r>
             <a:r>
-              <a:rPr lang="en-US" sz="1300" dirty="0" smtClean="0">
+              <a:rPr lang="en-US" sz="1300" dirty="0">
                 <a:solidFill>
                   <a:srgbClr val="5C6B7A"/>
                 </a:solidFill>
@@ -11034,7 +11984,7 @@
               <a:t>Running)</a:t>
             </a:r>
             <a:r>
-              <a:rPr lang="en-US" sz="1300" dirty="0" err="1" smtClean="0">
+              <a:rPr lang="en-US" sz="1300" dirty="0" err="1">
                 <a:solidFill>
                   <a:srgbClr val="5C6B7A"/>
                 </a:solidFill>
@@ -11045,7 +11995,7 @@
               <a:t>인지</a:t>
             </a:r>
             <a:r>
-              <a:rPr lang="en-US" sz="1300" dirty="0" smtClean="0">
+              <a:rPr lang="en-US" sz="1300" dirty="0">
                 <a:solidFill>
                   <a:srgbClr val="5C6B7A"/>
                 </a:solidFill>
@@ -11053,18 +12003,7 @@
                 <a:ea typeface="맑은 고딕" pitchFamily="34" charset="-122"/>
                 <a:cs typeface="맑은 고딕" pitchFamily="34" charset="-120"/>
               </a:rPr>
-              <a:t> </a:t>
-            </a:r>
-            <a:r>
-              <a:rPr lang="en-US" sz="1300" dirty="0">
-                <a:solidFill>
-                  <a:srgbClr val="5C6B7A"/>
-                </a:solidFill>
-                <a:latin typeface="맑은 고딕" pitchFamily="34" charset="0"/>
-                <a:ea typeface="맑은 고딕" pitchFamily="34" charset="-122"/>
-                <a:cs typeface="맑은 고딕" pitchFamily="34" charset="-120"/>
-              </a:rPr>
-              <a:t>확인합니다</a:t>
+              <a:t> 확인합니다</a:t>
             </a:r>
             <a:endParaRPr lang="en-US" sz="1300" dirty="0"/>
           </a:p>
@@ -11174,6 +12113,13 @@
             <a:prstDash val="solid"/>
           </a:ln>
         </p:spPr>
+        <p:txBody>
+          <a:bodyPr/>
+          <a:lstStyle/>
+          <a:p>
+            <a:endParaRPr lang="ko-KR" altLang="en-US"/>
+          </a:p>
+        </p:txBody>
       </p:sp>
       <p:sp>
         <p:nvSpPr>
@@ -11196,6 +12142,13 @@
           </a:solidFill>
           <a:ln/>
         </p:spPr>
+        <p:txBody>
+          <a:bodyPr/>
+          <a:lstStyle/>
+          <a:p>
+            <a:endParaRPr lang="ko-KR" altLang="en-US"/>
+          </a:p>
+        </p:txBody>
       </p:sp>
       <p:sp>
         <p:nvSpPr>
@@ -11385,6 +12338,13 @@
             <a:prstDash val="solid"/>
           </a:ln>
         </p:spPr>
+        <p:txBody>
+          <a:bodyPr/>
+          <a:lstStyle/>
+          <a:p>
+            <a:endParaRPr lang="ko-KR" altLang="en-US"/>
+          </a:p>
+        </p:txBody>
       </p:sp>
       <p:sp>
         <p:nvSpPr>
@@ -11497,6 +12457,13 @@
             </a:outerShdw>
           </a:effectLst>
         </p:spPr>
+        <p:txBody>
+          <a:bodyPr/>
+          <a:lstStyle/>
+          <a:p>
+            <a:endParaRPr lang="ko-KR" altLang="en-US"/>
+          </a:p>
+        </p:txBody>
       </p:sp>
       <p:sp>
         <p:nvSpPr>
@@ -11519,6 +12486,13 @@
           </a:solidFill>
           <a:ln/>
         </p:spPr>
+        <p:txBody>
+          <a:bodyPr/>
+          <a:lstStyle/>
+          <a:p>
+            <a:endParaRPr lang="ko-KR" altLang="en-US"/>
+          </a:p>
+        </p:txBody>
       </p:sp>
       <p:sp>
         <p:nvSpPr>
@@ -11539,6 +12513,13 @@
           </a:solidFill>
           <a:ln/>
         </p:spPr>
+        <p:txBody>
+          <a:bodyPr/>
+          <a:lstStyle/>
+          <a:p>
+            <a:endParaRPr lang="ko-KR" altLang="en-US"/>
+          </a:p>
+        </p:txBody>
       </p:sp>
       <p:sp>
         <p:nvSpPr>
@@ -11562,6 +12543,13 @@
             <a:prstDash val="solid"/>
           </a:ln>
         </p:spPr>
+        <p:txBody>
+          <a:bodyPr/>
+          <a:lstStyle/>
+          <a:p>
+            <a:endParaRPr lang="ko-KR" altLang="en-US"/>
+          </a:p>
+        </p:txBody>
       </p:sp>
       <p:sp>
         <p:nvSpPr>
@@ -11582,6 +12570,13 @@
           </a:solidFill>
           <a:ln/>
         </p:spPr>
+        <p:txBody>
+          <a:bodyPr/>
+          <a:lstStyle/>
+          <a:p>
+            <a:endParaRPr lang="ko-KR" altLang="en-US"/>
+          </a:p>
+        </p:txBody>
       </p:sp>
       <p:sp>
         <p:nvSpPr>
@@ -11602,6 +12597,13 @@
           </a:solidFill>
           <a:ln/>
         </p:spPr>
+        <p:txBody>
+          <a:bodyPr/>
+          <a:lstStyle/>
+          <a:p>
+            <a:endParaRPr lang="ko-KR" altLang="en-US"/>
+          </a:p>
+        </p:txBody>
       </p:sp>
       <p:sp>
         <p:nvSpPr>
@@ -11622,6 +12624,13 @@
           </a:solidFill>
           <a:ln/>
         </p:spPr>
+        <p:txBody>
+          <a:bodyPr/>
+          <a:lstStyle/>
+          <a:p>
+            <a:endParaRPr lang="ko-KR" altLang="en-US"/>
+          </a:p>
+        </p:txBody>
       </p:sp>
       <p:pic>
         <p:nvPicPr>
@@ -11706,7 +12715,7 @@
               <a:t>IPv4 </a:t>
             </a:r>
             <a:r>
-              <a:rPr lang="ko-KR" altLang="en-US" sz="1400" dirty="0" smtClean="0"/>
+              <a:rPr lang="ko-KR" altLang="en-US" sz="1400" dirty="0"/>
               <a:t>주소</a:t>
             </a:r>
             <a:endParaRPr lang="en-US" sz="1250" dirty="0"/>
@@ -11896,6 +12905,13 @@
             <a:prstDash val="solid"/>
           </a:ln>
         </p:spPr>
+        <p:txBody>
+          <a:bodyPr/>
+          <a:lstStyle/>
+          <a:p>
+            <a:endParaRPr lang="ko-KR" altLang="en-US"/>
+          </a:p>
+        </p:txBody>
       </p:sp>
       <p:sp>
         <p:nvSpPr>
@@ -12008,6 +13024,13 @@
             </a:outerShdw>
           </a:effectLst>
         </p:spPr>
+        <p:txBody>
+          <a:bodyPr/>
+          <a:lstStyle/>
+          <a:p>
+            <a:endParaRPr lang="ko-KR" altLang="en-US"/>
+          </a:p>
+        </p:txBody>
       </p:sp>
       <p:sp>
         <p:nvSpPr>
@@ -12030,6 +13053,13 @@
           </a:solidFill>
           <a:ln/>
         </p:spPr>
+        <p:txBody>
+          <a:bodyPr/>
+          <a:lstStyle/>
+          <a:p>
+            <a:endParaRPr lang="ko-KR" altLang="en-US"/>
+          </a:p>
+        </p:txBody>
       </p:sp>
       <p:sp>
         <p:nvSpPr>
@@ -12050,6 +13080,13 @@
           </a:solidFill>
           <a:ln/>
         </p:spPr>
+        <p:txBody>
+          <a:bodyPr/>
+          <a:lstStyle/>
+          <a:p>
+            <a:endParaRPr lang="ko-KR" altLang="en-US"/>
+          </a:p>
+        </p:txBody>
       </p:sp>
       <p:sp>
         <p:nvSpPr>
@@ -12073,6 +13110,13 @@
             <a:prstDash val="solid"/>
           </a:ln>
         </p:spPr>
+        <p:txBody>
+          <a:bodyPr/>
+          <a:lstStyle/>
+          <a:p>
+            <a:endParaRPr lang="ko-KR" altLang="en-US"/>
+          </a:p>
+        </p:txBody>
       </p:sp>
       <p:sp>
         <p:nvSpPr>
@@ -12093,6 +13137,13 @@
           </a:solidFill>
           <a:ln/>
         </p:spPr>
+        <p:txBody>
+          <a:bodyPr/>
+          <a:lstStyle/>
+          <a:p>
+            <a:endParaRPr lang="ko-KR" altLang="en-US"/>
+          </a:p>
+        </p:txBody>
       </p:sp>
       <p:sp>
         <p:nvSpPr>
@@ -12113,6 +13164,13 @@
           </a:solidFill>
           <a:ln/>
         </p:spPr>
+        <p:txBody>
+          <a:bodyPr/>
+          <a:lstStyle/>
+          <a:p>
+            <a:endParaRPr lang="ko-KR" altLang="en-US"/>
+          </a:p>
+        </p:txBody>
       </p:sp>
       <p:sp>
         <p:nvSpPr>
@@ -12133,6 +13191,13 @@
           </a:solidFill>
           <a:ln/>
         </p:spPr>
+        <p:txBody>
+          <a:bodyPr/>
+          <a:lstStyle/>
+          <a:p>
+            <a:endParaRPr lang="ko-KR" altLang="en-US"/>
+          </a:p>
+        </p:txBody>
       </p:sp>
       <p:pic>
         <p:nvPicPr>
@@ -12415,6 +13480,13 @@
             <a:prstDash val="solid"/>
           </a:ln>
         </p:spPr>
+        <p:txBody>
+          <a:bodyPr/>
+          <a:lstStyle/>
+          <a:p>
+            <a:endParaRPr lang="ko-KR" altLang="en-US"/>
+          </a:p>
+        </p:txBody>
       </p:sp>
       <p:sp>
         <p:nvSpPr>
@@ -12527,6 +13599,13 @@
             </a:outerShdw>
           </a:effectLst>
         </p:spPr>
+        <p:txBody>
+          <a:bodyPr/>
+          <a:lstStyle/>
+          <a:p>
+            <a:endParaRPr lang="ko-KR" altLang="en-US"/>
+          </a:p>
+        </p:txBody>
       </p:sp>
       <p:sp>
         <p:nvSpPr>
@@ -12549,6 +13628,13 @@
           </a:solidFill>
           <a:ln/>
         </p:spPr>
+        <p:txBody>
+          <a:bodyPr/>
+          <a:lstStyle/>
+          <a:p>
+            <a:endParaRPr lang="ko-KR" altLang="en-US"/>
+          </a:p>
+        </p:txBody>
       </p:sp>
       <p:sp>
         <p:nvSpPr>
@@ -12569,6 +13655,13 @@
           </a:solidFill>
           <a:ln/>
         </p:spPr>
+        <p:txBody>
+          <a:bodyPr/>
+          <a:lstStyle/>
+          <a:p>
+            <a:endParaRPr lang="ko-KR" altLang="en-US"/>
+          </a:p>
+        </p:txBody>
       </p:sp>
       <p:sp>
         <p:nvSpPr>
@@ -12592,6 +13685,13 @@
             <a:prstDash val="solid"/>
           </a:ln>
         </p:spPr>
+        <p:txBody>
+          <a:bodyPr/>
+          <a:lstStyle/>
+          <a:p>
+            <a:endParaRPr lang="ko-KR" altLang="en-US"/>
+          </a:p>
+        </p:txBody>
       </p:sp>
       <p:sp>
         <p:nvSpPr>
@@ -12612,6 +13712,13 @@
           </a:solidFill>
           <a:ln/>
         </p:spPr>
+        <p:txBody>
+          <a:bodyPr/>
+          <a:lstStyle/>
+          <a:p>
+            <a:endParaRPr lang="ko-KR" altLang="en-US"/>
+          </a:p>
+        </p:txBody>
       </p:sp>
       <p:sp>
         <p:nvSpPr>
@@ -12632,6 +13739,13 @@
           </a:solidFill>
           <a:ln/>
         </p:spPr>
+        <p:txBody>
+          <a:bodyPr/>
+          <a:lstStyle/>
+          <a:p>
+            <a:endParaRPr lang="ko-KR" altLang="en-US"/>
+          </a:p>
+        </p:txBody>
       </p:sp>
       <p:sp>
         <p:nvSpPr>
@@ -12652,6 +13766,13 @@
           </a:solidFill>
           <a:ln/>
         </p:spPr>
+        <p:txBody>
+          <a:bodyPr/>
+          <a:lstStyle/>
+          <a:p>
+            <a:endParaRPr lang="ko-KR" altLang="en-US"/>
+          </a:p>
+        </p:txBody>
       </p:sp>
       <p:pic>
         <p:nvPicPr>
@@ -12710,6 +13831,13 @@
             </a:outerShdw>
           </a:effectLst>
         </p:spPr>
+        <p:txBody>
+          <a:bodyPr/>
+          <a:lstStyle/>
+          <a:p>
+            <a:endParaRPr lang="ko-KR" altLang="en-US"/>
+          </a:p>
+        </p:txBody>
       </p:sp>
       <p:sp>
         <p:nvSpPr>
@@ -12732,6 +13860,13 @@
           </a:solidFill>
           <a:ln/>
         </p:spPr>
+        <p:txBody>
+          <a:bodyPr/>
+          <a:lstStyle/>
+          <a:p>
+            <a:endParaRPr lang="ko-KR" altLang="en-US"/>
+          </a:p>
+        </p:txBody>
       </p:sp>
       <p:sp>
         <p:nvSpPr>
@@ -12752,6 +13887,13 @@
           </a:solidFill>
           <a:ln/>
         </p:spPr>
+        <p:txBody>
+          <a:bodyPr/>
+          <a:lstStyle/>
+          <a:p>
+            <a:endParaRPr lang="ko-KR" altLang="en-US"/>
+          </a:p>
+        </p:txBody>
       </p:sp>
       <p:sp>
         <p:nvSpPr>
@@ -12775,6 +13917,13 @@
             <a:prstDash val="solid"/>
           </a:ln>
         </p:spPr>
+        <p:txBody>
+          <a:bodyPr/>
+          <a:lstStyle/>
+          <a:p>
+            <a:endParaRPr lang="ko-KR" altLang="en-US"/>
+          </a:p>
+        </p:txBody>
       </p:sp>
       <p:sp>
         <p:nvSpPr>
@@ -12795,6 +13944,13 @@
           </a:solidFill>
           <a:ln/>
         </p:spPr>
+        <p:txBody>
+          <a:bodyPr/>
+          <a:lstStyle/>
+          <a:p>
+            <a:endParaRPr lang="ko-KR" altLang="en-US"/>
+          </a:p>
+        </p:txBody>
       </p:sp>
       <p:sp>
         <p:nvSpPr>
@@ -12815,6 +13971,13 @@
           </a:solidFill>
           <a:ln/>
         </p:spPr>
+        <p:txBody>
+          <a:bodyPr/>
+          <a:lstStyle/>
+          <a:p>
+            <a:endParaRPr lang="ko-KR" altLang="en-US"/>
+          </a:p>
+        </p:txBody>
       </p:sp>
       <p:sp>
         <p:nvSpPr>
@@ -12835,6 +13998,13 @@
           </a:solidFill>
           <a:ln/>
         </p:spPr>
+        <p:txBody>
+          <a:bodyPr/>
+          <a:lstStyle/>
+          <a:p>
+            <a:endParaRPr lang="ko-KR" altLang="en-US"/>
+          </a:p>
+        </p:txBody>
       </p:sp>
       <p:pic>
         <p:nvPicPr>
@@ -12886,6 +14056,13 @@
             <a:prstDash val="solid"/>
           </a:ln>
         </p:spPr>
+        <p:txBody>
+          <a:bodyPr/>
+          <a:lstStyle/>
+          <a:p>
+            <a:endParaRPr lang="ko-KR" altLang="en-US"/>
+          </a:p>
+        </p:txBody>
       </p:sp>
       <p:sp>
         <p:nvSpPr>
@@ -12908,6 +14085,13 @@
           </a:solidFill>
           <a:ln/>
         </p:spPr>
+        <p:txBody>
+          <a:bodyPr/>
+          <a:lstStyle/>
+          <a:p>
+            <a:endParaRPr lang="ko-KR" altLang="en-US"/>
+          </a:p>
+        </p:txBody>
       </p:sp>
       <p:sp>
         <p:nvSpPr>
@@ -13202,7 +14386,7 @@
               <a:t>EC2 인스턴스 접속 방법은 크게 두 </a:t>
             </a:r>
             <a:r>
-              <a:rPr lang="en-US" sz="1200" dirty="0" err="1" smtClean="0">
+              <a:rPr lang="en-US" sz="1200" dirty="0" err="1">
                 <a:solidFill>
                   <a:srgbClr val="5C6B7A"/>
                 </a:solidFill>
@@ -13260,18 +14444,7 @@
                 <a:ea typeface="맑은 고딕" pitchFamily="34" charset="-122"/>
                 <a:cs typeface="맑은 고딕" pitchFamily="34" charset="-120"/>
               </a:rPr>
-              <a:t>  </a:t>
-            </a:r>
-            <a:r>
-              <a:rPr lang="en-US" sz="1200" smtClean="0">
-                <a:solidFill>
-                  <a:srgbClr val="232F3E"/>
-                </a:solidFill>
-                <a:latin typeface="맑은 고딕" pitchFamily="34" charset="0"/>
-                <a:ea typeface="맑은 고딕" pitchFamily="34" charset="-122"/>
-                <a:cs typeface="맑은 고딕" pitchFamily="34" charset="-120"/>
-              </a:rPr>
-              <a:t>   </a:t>
+              <a:t>     </a:t>
             </a:r>
             <a:r>
               <a:rPr lang="en-US" sz="1200" b="1" dirty="0">
@@ -13345,6 +14518,13 @@
           </a:solidFill>
           <a:ln/>
         </p:spPr>
+        <p:txBody>
+          <a:bodyPr/>
+          <a:lstStyle/>
+          <a:p>
+            <a:endParaRPr lang="ko-KR" altLang="en-US"/>
+          </a:p>
+        </p:txBody>
       </p:sp>
       <p:sp>
         <p:nvSpPr>
@@ -13484,6 +14664,13 @@
           </a:solidFill>
           <a:ln/>
         </p:spPr>
+        <p:txBody>
+          <a:bodyPr/>
+          <a:lstStyle/>
+          <a:p>
+            <a:endParaRPr lang="ko-KR" altLang="en-US"/>
+          </a:p>
+        </p:txBody>
       </p:sp>
       <p:sp>
         <p:nvSpPr>
@@ -13562,14 +14749,6 @@
               </a:rPr>
               <a:t>전 세계에 분산된 독립적인 데이터센터 클러스터. </a:t>
             </a:r>
-            <a:endParaRPr lang="en-US" sz="1100" dirty="0" smtClean="0">
-              <a:solidFill>
-                <a:srgbClr val="1C1633"/>
-              </a:solidFill>
-              <a:latin typeface="맑은 고딕" pitchFamily="34" charset="0"/>
-              <a:ea typeface="맑은 고딕" pitchFamily="34" charset="-122"/>
-              <a:cs typeface="맑은 고딕" pitchFamily="34" charset="-120"/>
-            </a:endParaRPr>
           </a:p>
           <a:p>
             <a:pPr marL="0" indent="0">
@@ -13579,7 +14758,7 @@
               <a:buNone/>
             </a:pPr>
             <a:r>
-              <a:rPr lang="en-US" sz="1100" dirty="0" err="1" smtClean="0">
+              <a:rPr lang="en-US" sz="1100" dirty="0" err="1">
                 <a:solidFill>
                   <a:srgbClr val="1C1633"/>
                 </a:solidFill>
@@ -13590,7 +14769,7 @@
               <a:t>서울</a:t>
             </a:r>
             <a:r>
-              <a:rPr lang="en-US" sz="1100" dirty="0" smtClean="0">
+              <a:rPr lang="en-US" sz="1100" dirty="0">
                 <a:solidFill>
                   <a:srgbClr val="1C1633"/>
                 </a:solidFill>
@@ -13598,18 +14777,7 @@
                 <a:ea typeface="맑은 고딕" pitchFamily="34" charset="-122"/>
                 <a:cs typeface="맑은 고딕" pitchFamily="34" charset="-120"/>
               </a:rPr>
-              <a:t> </a:t>
-            </a:r>
-            <a:r>
-              <a:rPr lang="en-US" sz="1100" dirty="0">
-                <a:solidFill>
-                  <a:srgbClr val="1C1633"/>
-                </a:solidFill>
-                <a:latin typeface="맑은 고딕" pitchFamily="34" charset="0"/>
-                <a:ea typeface="맑은 고딕" pitchFamily="34" charset="-122"/>
-                <a:cs typeface="맑은 고딕" pitchFamily="34" charset="-120"/>
-              </a:rPr>
-              <a:t>리전(ap-northeast-2)처럼 지리적 위치 단위로 구분됩니다.</a:t>
+              <a:t> 리전(ap-northeast-2)처럼 지리적 위치 단위로 구분됩니다.</a:t>
             </a:r>
             <a:endParaRPr lang="en-US" sz="1100" dirty="0"/>
           </a:p>
@@ -13636,6 +14804,13 @@
           </a:solidFill>
           <a:ln/>
         </p:spPr>
+        <p:txBody>
+          <a:bodyPr/>
+          <a:lstStyle/>
+          <a:p>
+            <a:endParaRPr lang="ko-KR" altLang="en-US"/>
+          </a:p>
+        </p:txBody>
       </p:sp>
       <p:sp>
         <p:nvSpPr>
@@ -13714,14 +14889,6 @@
               </a:rPr>
               <a:t>한 Region 안에 물리적으로 분리된 복수의 데이터센터. </a:t>
             </a:r>
-            <a:endParaRPr lang="en-US" sz="1100" dirty="0" smtClean="0">
-              <a:solidFill>
-                <a:srgbClr val="1C1633"/>
-              </a:solidFill>
-              <a:latin typeface="맑은 고딕" pitchFamily="34" charset="0"/>
-              <a:ea typeface="맑은 고딕" pitchFamily="34" charset="-122"/>
-              <a:cs typeface="맑은 고딕" pitchFamily="34" charset="-120"/>
-            </a:endParaRPr>
           </a:p>
           <a:p>
             <a:pPr marL="0" indent="0">
@@ -13731,7 +14898,7 @@
               <a:buNone/>
             </a:pPr>
             <a:r>
-              <a:rPr lang="en-US" sz="1100" dirty="0" err="1" smtClean="0">
+              <a:rPr lang="en-US" sz="1100" dirty="0" err="1">
                 <a:solidFill>
                   <a:srgbClr val="1C1633"/>
                 </a:solidFill>
@@ -13742,7 +14909,7 @@
               <a:t>서울</a:t>
             </a:r>
             <a:r>
-              <a:rPr lang="en-US" sz="1100" dirty="0" smtClean="0">
+              <a:rPr lang="en-US" sz="1100" dirty="0">
                 <a:solidFill>
                   <a:srgbClr val="1C1633"/>
                 </a:solidFill>
@@ -13750,43 +14917,32 @@
                 <a:ea typeface="맑은 고딕" pitchFamily="34" charset="-122"/>
                 <a:cs typeface="맑은 고딕" pitchFamily="34" charset="-120"/>
               </a:rPr>
+              <a:t> 리전에는 현재 4개의 </a:t>
+            </a:r>
+            <a:r>
+              <a:rPr lang="en-US" sz="1100" dirty="0" err="1">
+                <a:solidFill>
+                  <a:srgbClr val="1C1633"/>
+                </a:solidFill>
+                <a:latin typeface="맑은 고딕" pitchFamily="34" charset="0"/>
+                <a:ea typeface="맑은 고딕" pitchFamily="34" charset="-122"/>
+                <a:cs typeface="맑은 고딕" pitchFamily="34" charset="-120"/>
+              </a:rPr>
+              <a:t>AZ가</a:t>
+            </a:r>
+            <a:r>
+              <a:rPr lang="en-US" sz="1100" dirty="0">
+                <a:solidFill>
+                  <a:srgbClr val="1C1633"/>
+                </a:solidFill>
+                <a:latin typeface="맑은 고딕" pitchFamily="34" charset="0"/>
+                <a:ea typeface="맑은 고딕" pitchFamily="34" charset="-122"/>
+                <a:cs typeface="맑은 고딕" pitchFamily="34" charset="-120"/>
+              </a:rPr>
               <a:t> </a:t>
             </a:r>
             <a:r>
-              <a:rPr lang="en-US" sz="1100" dirty="0">
-                <a:solidFill>
-                  <a:srgbClr val="1C1633"/>
-                </a:solidFill>
-                <a:latin typeface="맑은 고딕" pitchFamily="34" charset="0"/>
-                <a:ea typeface="맑은 고딕" pitchFamily="34" charset="-122"/>
-                <a:cs typeface="맑은 고딕" pitchFamily="34" charset="-120"/>
-              </a:rPr>
-              <a:t>리전에는 현재 4개의 </a:t>
-            </a:r>
-            <a:r>
               <a:rPr lang="en-US" sz="1100" dirty="0" err="1">
-                <a:solidFill>
-                  <a:srgbClr val="1C1633"/>
-                </a:solidFill>
-                <a:latin typeface="맑은 고딕" pitchFamily="34" charset="0"/>
-                <a:ea typeface="맑은 고딕" pitchFamily="34" charset="-122"/>
-                <a:cs typeface="맑은 고딕" pitchFamily="34" charset="-120"/>
-              </a:rPr>
-              <a:t>AZ가</a:t>
-            </a:r>
-            <a:r>
-              <a:rPr lang="en-US" sz="1100" dirty="0">
-                <a:solidFill>
-                  <a:srgbClr val="1C1633"/>
-                </a:solidFill>
-                <a:latin typeface="맑은 고딕" pitchFamily="34" charset="0"/>
-                <a:ea typeface="맑은 고딕" pitchFamily="34" charset="-122"/>
-                <a:cs typeface="맑은 고딕" pitchFamily="34" charset="-120"/>
-              </a:rPr>
-              <a:t> </a:t>
-            </a:r>
-            <a:r>
-              <a:rPr lang="en-US" sz="1100" dirty="0" err="1" smtClean="0">
                 <a:solidFill>
                   <a:srgbClr val="1C1633"/>
                 </a:solidFill>
@@ -13875,7 +15031,7 @@
               <a:buNone/>
             </a:pPr>
             <a:r>
-              <a:rPr lang="en-US" sz="900" dirty="0" smtClean="0">
+              <a:rPr lang="en-US" sz="900" dirty="0">
                 <a:solidFill>
                   <a:srgbClr val="6E6690"/>
                 </a:solidFill>
@@ -14095,29 +15251,7 @@
                 <a:ea typeface="맑은 고딕" pitchFamily="34" charset="-122"/>
                 <a:cs typeface="맑은 고딕" pitchFamily="34" charset="-120"/>
               </a:rPr>
-              <a:t>Region </a:t>
-            </a:r>
-            <a:r>
-              <a:rPr lang="en-US" sz="1300" b="1" dirty="0" smtClean="0">
-                <a:solidFill>
-                  <a:srgbClr val="4C2FB0"/>
-                </a:solidFill>
-                <a:latin typeface="맑은 고딕" pitchFamily="34" charset="0"/>
-                <a:ea typeface="맑은 고딕" pitchFamily="34" charset="-122"/>
-                <a:cs typeface="맑은 고딕" pitchFamily="34" charset="-120"/>
-              </a:rPr>
-              <a:t>: </a:t>
-            </a:r>
-            <a:r>
-              <a:rPr lang="en-US" sz="1300" b="1" dirty="0">
-                <a:solidFill>
-                  <a:srgbClr val="4C2FB0"/>
-                </a:solidFill>
-                <a:latin typeface="맑은 고딕" pitchFamily="34" charset="0"/>
-                <a:ea typeface="맑은 고딕" pitchFamily="34" charset="-122"/>
-                <a:cs typeface="맑은 고딕" pitchFamily="34" charset="-120"/>
-              </a:rPr>
-              <a:t>ap-northeast-2 (서울)</a:t>
+              <a:t>Region : ap-northeast-2 (서울)</a:t>
             </a:r>
             <a:endParaRPr lang="en-US" sz="1300" dirty="0"/>
           </a:p>
@@ -15102,6 +16236,13 @@
           </a:solidFill>
           <a:ln/>
         </p:spPr>
+        <p:txBody>
+          <a:bodyPr/>
+          <a:lstStyle/>
+          <a:p>
+            <a:endParaRPr lang="ko-KR" altLang="en-US"/>
+          </a:p>
+        </p:txBody>
       </p:sp>
       <p:sp>
         <p:nvSpPr>
@@ -15284,7 +16425,7 @@
               <a:buNone/>
             </a:pPr>
             <a:r>
-              <a:rPr lang="en-US" sz="900" dirty="0" smtClean="0">
+              <a:rPr lang="en-US" sz="900" dirty="0">
                 <a:solidFill>
                   <a:srgbClr val="6E6690"/>
                 </a:solidFill>
@@ -15885,6 +17026,13 @@
           </a:solidFill>
           <a:ln/>
         </p:spPr>
+        <p:txBody>
+          <a:bodyPr/>
+          <a:lstStyle/>
+          <a:p>
+            <a:endParaRPr lang="ko-KR" altLang="en-US"/>
+          </a:p>
+        </p:txBody>
       </p:sp>
       <p:sp>
         <p:nvSpPr>
@@ -15946,6 +17094,13 @@
           </a:solidFill>
           <a:ln/>
         </p:spPr>
+        <p:txBody>
+          <a:bodyPr/>
+          <a:lstStyle/>
+          <a:p>
+            <a:endParaRPr lang="ko-KR" altLang="en-US"/>
+          </a:p>
+        </p:txBody>
       </p:sp>
       <p:sp>
         <p:nvSpPr>
@@ -16007,6 +17162,13 @@
           </a:solidFill>
           <a:ln/>
         </p:spPr>
+        <p:txBody>
+          <a:bodyPr/>
+          <a:lstStyle/>
+          <a:p>
+            <a:endParaRPr lang="ko-KR" altLang="en-US"/>
+          </a:p>
+        </p:txBody>
       </p:sp>
       <p:sp>
         <p:nvSpPr>
@@ -16068,6 +17230,13 @@
           </a:solidFill>
           <a:ln/>
         </p:spPr>
+        <p:txBody>
+          <a:bodyPr/>
+          <a:lstStyle/>
+          <a:p>
+            <a:endParaRPr lang="ko-KR" altLang="en-US"/>
+          </a:p>
+        </p:txBody>
       </p:sp>
       <p:sp>
         <p:nvSpPr>
@@ -16129,6 +17298,13 @@
           </a:solidFill>
           <a:ln/>
         </p:spPr>
+        <p:txBody>
+          <a:bodyPr/>
+          <a:lstStyle/>
+          <a:p>
+            <a:endParaRPr lang="ko-KR" altLang="en-US"/>
+          </a:p>
+        </p:txBody>
       </p:sp>
       <p:sp>
         <p:nvSpPr>
@@ -16190,6 +17366,13 @@
           </a:solidFill>
           <a:ln/>
         </p:spPr>
+        <p:txBody>
+          <a:bodyPr/>
+          <a:lstStyle/>
+          <a:p>
+            <a:endParaRPr lang="ko-KR" altLang="en-US"/>
+          </a:p>
+        </p:txBody>
       </p:sp>
       <p:sp>
         <p:nvSpPr>
@@ -16251,6 +17434,13 @@
           </a:solidFill>
           <a:ln/>
         </p:spPr>
+        <p:txBody>
+          <a:bodyPr/>
+          <a:lstStyle/>
+          <a:p>
+            <a:endParaRPr lang="ko-KR" altLang="en-US"/>
+          </a:p>
+        </p:txBody>
       </p:sp>
       <p:sp>
         <p:nvSpPr>
@@ -16312,6 +17502,13 @@
           </a:solidFill>
           <a:ln/>
         </p:spPr>
+        <p:txBody>
+          <a:bodyPr/>
+          <a:lstStyle/>
+          <a:p>
+            <a:endParaRPr lang="ko-KR" altLang="en-US"/>
+          </a:p>
+        </p:txBody>
       </p:sp>
       <p:sp>
         <p:nvSpPr>
@@ -16373,6 +17570,13 @@
           </a:solidFill>
           <a:ln/>
         </p:spPr>
+        <p:txBody>
+          <a:bodyPr/>
+          <a:lstStyle/>
+          <a:p>
+            <a:endParaRPr lang="ko-KR" altLang="en-US"/>
+          </a:p>
+        </p:txBody>
       </p:sp>
       <p:sp>
         <p:nvSpPr>
@@ -16434,6 +17638,13 @@
           </a:solidFill>
           <a:ln/>
         </p:spPr>
+        <p:txBody>
+          <a:bodyPr/>
+          <a:lstStyle/>
+          <a:p>
+            <a:endParaRPr lang="ko-KR" altLang="en-US"/>
+          </a:p>
+        </p:txBody>
       </p:sp>
       <p:sp>
         <p:nvSpPr>
@@ -16495,6 +17706,13 @@
           </a:solidFill>
           <a:ln/>
         </p:spPr>
+        <p:txBody>
+          <a:bodyPr/>
+          <a:lstStyle/>
+          <a:p>
+            <a:endParaRPr lang="ko-KR" altLang="en-US"/>
+          </a:p>
+        </p:txBody>
       </p:sp>
       <p:sp>
         <p:nvSpPr>
@@ -16556,6 +17774,13 @@
           </a:solidFill>
           <a:ln/>
         </p:spPr>
+        <p:txBody>
+          <a:bodyPr/>
+          <a:lstStyle/>
+          <a:p>
+            <a:endParaRPr lang="ko-KR" altLang="en-US"/>
+          </a:p>
+        </p:txBody>
       </p:sp>
       <p:sp>
         <p:nvSpPr>
@@ -16686,6 +17911,13 @@
           </a:solidFill>
           <a:ln/>
         </p:spPr>
+        <p:txBody>
+          <a:bodyPr/>
+          <a:lstStyle/>
+          <a:p>
+            <a:endParaRPr lang="ko-KR" altLang="en-US"/>
+          </a:p>
+        </p:txBody>
       </p:sp>
       <p:sp>
         <p:nvSpPr>
@@ -16786,6 +18018,13 @@
           </a:solidFill>
           <a:ln/>
         </p:spPr>
+        <p:txBody>
+          <a:bodyPr/>
+          <a:lstStyle/>
+          <a:p>
+            <a:endParaRPr lang="ko-KR" altLang="en-US"/>
+          </a:p>
+        </p:txBody>
       </p:sp>
       <p:sp>
         <p:nvSpPr>
@@ -17020,6 +18259,13 @@
             <a:prstDash val="solid"/>
           </a:ln>
         </p:spPr>
+        <p:txBody>
+          <a:bodyPr/>
+          <a:lstStyle/>
+          <a:p>
+            <a:endParaRPr lang="ko-KR" altLang="en-US"/>
+          </a:p>
+        </p:txBody>
       </p:sp>
       <p:sp>
         <p:nvSpPr>
@@ -17040,6 +18286,13 @@
           </a:solidFill>
           <a:ln/>
         </p:spPr>
+        <p:txBody>
+          <a:bodyPr/>
+          <a:lstStyle/>
+          <a:p>
+            <a:endParaRPr lang="ko-KR" altLang="en-US"/>
+          </a:p>
+        </p:txBody>
       </p:sp>
       <p:sp>
         <p:nvSpPr>
@@ -17060,6 +18313,13 @@
           </a:solidFill>
           <a:ln/>
         </p:spPr>
+        <p:txBody>
+          <a:bodyPr/>
+          <a:lstStyle/>
+          <a:p>
+            <a:endParaRPr lang="ko-KR" altLang="en-US"/>
+          </a:p>
+        </p:txBody>
       </p:sp>
       <p:sp>
         <p:nvSpPr>
@@ -17080,6 +18340,13 @@
           </a:solidFill>
           <a:ln/>
         </p:spPr>
+        <p:txBody>
+          <a:bodyPr/>
+          <a:lstStyle/>
+          <a:p>
+            <a:endParaRPr lang="ko-KR" altLang="en-US"/>
+          </a:p>
+        </p:txBody>
       </p:sp>
       <p:sp>
         <p:nvSpPr>
@@ -17206,7 +18473,7 @@
               <a:buNone/>
             </a:pPr>
             <a:r>
-              <a:rPr lang="en-US" sz="900" dirty="0" smtClean="0">
+              <a:rPr lang="en-US" sz="900" dirty="0">
                 <a:solidFill>
                   <a:srgbClr val="6E6690"/>
                 </a:solidFill>
@@ -17303,6 +18570,13 @@
           </a:solidFill>
           <a:ln/>
         </p:spPr>
+        <p:txBody>
+          <a:bodyPr/>
+          <a:lstStyle/>
+          <a:p>
+            <a:endParaRPr lang="ko-KR" altLang="en-US"/>
+          </a:p>
+        </p:txBody>
       </p:sp>
       <p:sp>
         <p:nvSpPr>
@@ -17325,6 +18599,13 @@
           </a:solidFill>
           <a:ln/>
         </p:spPr>
+        <p:txBody>
+          <a:bodyPr/>
+          <a:lstStyle/>
+          <a:p>
+            <a:endParaRPr lang="ko-KR" altLang="en-US"/>
+          </a:p>
+        </p:txBody>
       </p:sp>
       <p:sp>
         <p:nvSpPr>
@@ -17347,6 +18628,13 @@
           </a:solidFill>
           <a:ln/>
         </p:spPr>
+        <p:txBody>
+          <a:bodyPr/>
+          <a:lstStyle/>
+          <a:p>
+            <a:endParaRPr lang="ko-KR" altLang="en-US"/>
+          </a:p>
+        </p:txBody>
       </p:sp>
       <p:sp>
         <p:nvSpPr>
@@ -17369,6 +18657,13 @@
           </a:solidFill>
           <a:ln/>
         </p:spPr>
+        <p:txBody>
+          <a:bodyPr/>
+          <a:lstStyle/>
+          <a:p>
+            <a:endParaRPr lang="ko-KR" altLang="en-US"/>
+          </a:p>
+        </p:txBody>
       </p:sp>
       <p:sp>
         <p:nvSpPr>
@@ -17391,6 +18686,13 @@
           </a:solidFill>
           <a:ln/>
         </p:spPr>
+        <p:txBody>
+          <a:bodyPr/>
+          <a:lstStyle/>
+          <a:p>
+            <a:endParaRPr lang="ko-KR" altLang="en-US"/>
+          </a:p>
+        </p:txBody>
       </p:sp>
       <p:sp>
         <p:nvSpPr>
@@ -17413,6 +18715,13 @@
           </a:solidFill>
           <a:ln/>
         </p:spPr>
+        <p:txBody>
+          <a:bodyPr/>
+          <a:lstStyle/>
+          <a:p>
+            <a:endParaRPr lang="ko-KR" altLang="en-US"/>
+          </a:p>
+        </p:txBody>
       </p:sp>
       <p:sp>
         <p:nvSpPr>
@@ -17435,6 +18744,13 @@
           </a:solidFill>
           <a:ln/>
         </p:spPr>
+        <p:txBody>
+          <a:bodyPr/>
+          <a:lstStyle/>
+          <a:p>
+            <a:endParaRPr lang="ko-KR" altLang="en-US"/>
+          </a:p>
+        </p:txBody>
       </p:sp>
       <p:sp>
         <p:nvSpPr>
@@ -17457,6 +18773,13 @@
           </a:solidFill>
           <a:ln/>
         </p:spPr>
+        <p:txBody>
+          <a:bodyPr/>
+          <a:lstStyle/>
+          <a:p>
+            <a:endParaRPr lang="ko-KR" altLang="en-US"/>
+          </a:p>
+        </p:txBody>
       </p:sp>
       <p:sp>
         <p:nvSpPr>
@@ -17482,6 +18805,13 @@
             <a:prstDash val="solid"/>
           </a:ln>
         </p:spPr>
+        <p:txBody>
+          <a:bodyPr/>
+          <a:lstStyle/>
+          <a:p>
+            <a:endParaRPr lang="ko-KR" altLang="en-US"/>
+          </a:p>
+        </p:txBody>
       </p:sp>
       <p:sp>
         <p:nvSpPr>
@@ -17507,6 +18837,13 @@
             <a:prstDash val="solid"/>
           </a:ln>
         </p:spPr>
+        <p:txBody>
+          <a:bodyPr/>
+          <a:lstStyle/>
+          <a:p>
+            <a:endParaRPr lang="ko-KR" altLang="en-US"/>
+          </a:p>
+        </p:txBody>
       </p:sp>
       <p:sp>
         <p:nvSpPr>
@@ -17532,6 +18869,13 @@
             <a:prstDash val="solid"/>
           </a:ln>
         </p:spPr>
+        <p:txBody>
+          <a:bodyPr/>
+          <a:lstStyle/>
+          <a:p>
+            <a:endParaRPr lang="ko-KR" altLang="en-US"/>
+          </a:p>
+        </p:txBody>
       </p:sp>
       <p:sp>
         <p:nvSpPr>
@@ -17557,6 +18901,13 @@
             <a:prstDash val="solid"/>
           </a:ln>
         </p:spPr>
+        <p:txBody>
+          <a:bodyPr/>
+          <a:lstStyle/>
+          <a:p>
+            <a:endParaRPr lang="ko-KR" altLang="en-US"/>
+          </a:p>
+        </p:txBody>
       </p:sp>
       <p:sp>
         <p:nvSpPr>
@@ -17582,6 +18933,13 @@
             <a:prstDash val="solid"/>
           </a:ln>
         </p:spPr>
+        <p:txBody>
+          <a:bodyPr/>
+          <a:lstStyle/>
+          <a:p>
+            <a:endParaRPr lang="ko-KR" altLang="en-US"/>
+          </a:p>
+        </p:txBody>
       </p:sp>
       <p:sp>
         <p:nvSpPr>
@@ -17607,6 +18965,13 @@
             <a:prstDash val="solid"/>
           </a:ln>
         </p:spPr>
+        <p:txBody>
+          <a:bodyPr/>
+          <a:lstStyle/>
+          <a:p>
+            <a:endParaRPr lang="ko-KR" altLang="en-US"/>
+          </a:p>
+        </p:txBody>
       </p:sp>
       <p:sp>
         <p:nvSpPr>
@@ -17632,6 +18997,13 @@
             <a:prstDash val="solid"/>
           </a:ln>
         </p:spPr>
+        <p:txBody>
+          <a:bodyPr/>
+          <a:lstStyle/>
+          <a:p>
+            <a:endParaRPr lang="ko-KR" altLang="en-US"/>
+          </a:p>
+        </p:txBody>
       </p:sp>
       <p:sp>
         <p:nvSpPr>
@@ -17661,6 +19033,13 @@
             <a:prstDash val="solid"/>
           </a:ln>
         </p:spPr>
+        <p:txBody>
+          <a:bodyPr/>
+          <a:lstStyle/>
+          <a:p>
+            <a:endParaRPr lang="ko-KR" altLang="en-US"/>
+          </a:p>
+        </p:txBody>
       </p:sp>
       <p:sp>
         <p:nvSpPr>
@@ -17916,6 +19295,13 @@
             <a:prstDash val="solid"/>
           </a:ln>
         </p:spPr>
+        <p:txBody>
+          <a:bodyPr/>
+          <a:lstStyle/>
+          <a:p>
+            <a:endParaRPr lang="ko-KR" altLang="en-US"/>
+          </a:p>
+        </p:txBody>
       </p:sp>
       <p:sp>
         <p:nvSpPr>
@@ -18203,6 +19589,13 @@
             <a:prstDash val="solid"/>
           </a:ln>
         </p:spPr>
+        <p:txBody>
+          <a:bodyPr/>
+          <a:lstStyle/>
+          <a:p>
+            <a:endParaRPr lang="ko-KR" altLang="en-US"/>
+          </a:p>
+        </p:txBody>
       </p:sp>
       <p:sp>
         <p:nvSpPr>
@@ -18229,7 +19622,7 @@
               <a:buNone/>
             </a:pPr>
             <a:r>
-              <a:rPr lang="en-US" sz="1500" b="1" dirty="0" smtClean="0">
+              <a:rPr lang="en-US" sz="1500" b="1" dirty="0">
                 <a:solidFill>
                   <a:srgbClr val="232F3E"/>
                 </a:solidFill>
@@ -18244,7 +19637,7 @@
               <a:buNone/>
             </a:pPr>
             <a:r>
-              <a:rPr lang="en-US" sz="1200" dirty="0" smtClean="0">
+              <a:rPr lang="en-US" sz="1200" dirty="0">
                 <a:solidFill>
                   <a:srgbClr val="232F3E"/>
                 </a:solidFill>
@@ -18283,6 +19676,13 @@
             <a:prstDash val="solid"/>
           </a:ln>
         </p:spPr>
+        <p:txBody>
+          <a:bodyPr/>
+          <a:lstStyle/>
+          <a:p>
+            <a:endParaRPr lang="ko-KR" altLang="en-US"/>
+          </a:p>
+        </p:txBody>
       </p:sp>
       <p:sp>
         <p:nvSpPr>
@@ -18309,7 +19709,7 @@
               <a:buNone/>
             </a:pPr>
             <a:r>
-              <a:rPr lang="en-US" sz="1500" b="1" dirty="0" smtClean="0">
+              <a:rPr lang="en-US" sz="1500" b="1" dirty="0">
                 <a:solidFill>
                   <a:srgbClr val="232F3E"/>
                 </a:solidFill>
@@ -18324,7 +19724,7 @@
               <a:buNone/>
             </a:pPr>
             <a:r>
-              <a:rPr lang="en-US" sz="1200" dirty="0" smtClean="0">
+              <a:rPr lang="en-US" sz="1200" dirty="0">
                 <a:solidFill>
                   <a:srgbClr val="232F3E"/>
                 </a:solidFill>
@@ -18360,6 +19760,13 @@
             <a:tailEnd type="triangle"/>
           </a:ln>
         </p:spPr>
+        <p:txBody>
+          <a:bodyPr/>
+          <a:lstStyle/>
+          <a:p>
+            <a:endParaRPr lang="ko-KR" altLang="en-US"/>
+          </a:p>
+        </p:txBody>
       </p:sp>
       <p:sp>
         <p:nvSpPr>
@@ -18472,18 +19879,7 @@
                 <a:ea typeface="맑은 고딕" pitchFamily="34" charset="-122"/>
                 <a:cs typeface="맑은 고딕" pitchFamily="34" charset="-120"/>
               </a:rPr>
-              <a:t>Public </a:t>
-            </a:r>
-            <a:r>
-              <a:rPr lang="en-US" sz="1050" dirty="0" smtClean="0">
-                <a:solidFill>
-                  <a:srgbClr val="5C6B7A"/>
-                </a:solidFill>
-                <a:latin typeface="맑은 고딕" pitchFamily="34" charset="0"/>
-                <a:ea typeface="맑은 고딕" pitchFamily="34" charset="-122"/>
-                <a:cs typeface="맑은 고딕" pitchFamily="34" charset="-120"/>
-              </a:rPr>
-              <a:t>Key</a:t>
+              <a:t>Public Key</a:t>
             </a:r>
             <a:endParaRPr lang="en-US" sz="1050" dirty="0"/>
           </a:p>
@@ -18522,6 +19918,13 @@
             </a:outerShdw>
           </a:effectLst>
         </p:spPr>
+        <p:txBody>
+          <a:bodyPr/>
+          <a:lstStyle/>
+          <a:p>
+            <a:endParaRPr lang="ko-KR" altLang="en-US"/>
+          </a:p>
+        </p:txBody>
       </p:sp>
       <p:sp>
         <p:nvSpPr>
@@ -18544,6 +19947,13 @@
           </a:solidFill>
           <a:ln/>
         </p:spPr>
+        <p:txBody>
+          <a:bodyPr/>
+          <a:lstStyle/>
+          <a:p>
+            <a:endParaRPr lang="ko-KR" altLang="en-US"/>
+          </a:p>
+        </p:txBody>
       </p:sp>
       <p:sp>
         <p:nvSpPr>
@@ -18564,6 +19974,13 @@
           </a:solidFill>
           <a:ln/>
         </p:spPr>
+        <p:txBody>
+          <a:bodyPr/>
+          <a:lstStyle/>
+          <a:p>
+            <a:endParaRPr lang="ko-KR" altLang="en-US"/>
+          </a:p>
+        </p:txBody>
       </p:sp>
       <p:sp>
         <p:nvSpPr>
@@ -18587,6 +20004,13 @@
             <a:prstDash val="solid"/>
           </a:ln>
         </p:spPr>
+        <p:txBody>
+          <a:bodyPr/>
+          <a:lstStyle/>
+          <a:p>
+            <a:endParaRPr lang="ko-KR" altLang="en-US"/>
+          </a:p>
+        </p:txBody>
       </p:sp>
       <p:sp>
         <p:nvSpPr>
@@ -18607,6 +20031,13 @@
           </a:solidFill>
           <a:ln/>
         </p:spPr>
+        <p:txBody>
+          <a:bodyPr/>
+          <a:lstStyle/>
+          <a:p>
+            <a:endParaRPr lang="ko-KR" altLang="en-US"/>
+          </a:p>
+        </p:txBody>
       </p:sp>
       <p:sp>
         <p:nvSpPr>
@@ -18627,6 +20058,13 @@
           </a:solidFill>
           <a:ln/>
         </p:spPr>
+        <p:txBody>
+          <a:bodyPr/>
+          <a:lstStyle/>
+          <a:p>
+            <a:endParaRPr lang="ko-KR" altLang="en-US"/>
+          </a:p>
+        </p:txBody>
       </p:sp>
       <p:sp>
         <p:nvSpPr>
@@ -18647,6 +20085,13 @@
           </a:solidFill>
           <a:ln/>
         </p:spPr>
+        <p:txBody>
+          <a:bodyPr/>
+          <a:lstStyle/>
+          <a:p>
+            <a:endParaRPr lang="ko-KR" altLang="en-US"/>
+          </a:p>
+        </p:txBody>
       </p:sp>
       <p:sp>
         <p:nvSpPr>
@@ -18878,7 +20323,7 @@
               <a:buNone/>
             </a:pPr>
             <a:r>
-              <a:rPr lang="en-US" sz="1050" dirty="0" smtClean="0">
+              <a:rPr lang="en-US" sz="1050" dirty="0">
                 <a:solidFill>
                   <a:srgbClr val="5C6B7A"/>
                 </a:solidFill>
@@ -18951,6 +20396,13 @@
             <a:prstDash val="solid"/>
           </a:ln>
         </p:spPr>
+        <p:txBody>
+          <a:bodyPr/>
+          <a:lstStyle/>
+          <a:p>
+            <a:endParaRPr lang="ko-KR" altLang="en-US"/>
+          </a:p>
+        </p:txBody>
       </p:sp>
       <p:sp>
         <p:nvSpPr>
@@ -19056,6 +20508,13 @@
             <a:prstDash val="solid"/>
           </a:ln>
         </p:spPr>
+        <p:txBody>
+          <a:bodyPr/>
+          <a:lstStyle/>
+          <a:p>
+            <a:endParaRPr lang="ko-KR" altLang="en-US"/>
+          </a:p>
+        </p:txBody>
       </p:sp>
       <p:sp>
         <p:nvSpPr>
@@ -19161,6 +20620,13 @@
             <a:prstDash val="solid"/>
           </a:ln>
         </p:spPr>
+        <p:txBody>
+          <a:bodyPr/>
+          <a:lstStyle/>
+          <a:p>
+            <a:endParaRPr lang="ko-KR" altLang="en-US"/>
+          </a:p>
+        </p:txBody>
       </p:sp>
       <p:sp>
         <p:nvSpPr>
@@ -19263,6 +20729,13 @@
             <a:tailEnd type="triangle"/>
           </a:ln>
         </p:spPr>
+        <p:txBody>
+          <a:bodyPr/>
+          <a:lstStyle/>
+          <a:p>
+            <a:endParaRPr lang="ko-KR" altLang="en-US"/>
+          </a:p>
+        </p:txBody>
       </p:sp>
       <p:sp>
         <p:nvSpPr>
@@ -19287,6 +20760,13 @@
             <a:tailEnd type="triangle"/>
           </a:ln>
         </p:spPr>
+        <p:txBody>
+          <a:bodyPr/>
+          <a:lstStyle/>
+          <a:p>
+            <a:endParaRPr lang="ko-KR" altLang="en-US"/>
+          </a:p>
+        </p:txBody>
       </p:sp>
       <p:sp>
         <p:nvSpPr>
@@ -19421,29 +20901,7 @@
                 <a:ea typeface="맑은 고딕" pitchFamily="34" charset="-122"/>
                 <a:cs typeface="맑은 고딕" pitchFamily="34" charset="-120"/>
               </a:rPr>
-              <a:t> </a:t>
-            </a:r>
-            <a:r>
-              <a:rPr lang="en-US" sz="1400" b="1" dirty="0" smtClean="0">
-                <a:solidFill>
-                  <a:srgbClr val="232F3E"/>
-                </a:solidFill>
-                <a:latin typeface="맑은 고딕" pitchFamily="34" charset="0"/>
-                <a:ea typeface="맑은 고딕" pitchFamily="34" charset="-122"/>
-                <a:cs typeface="맑은 고딕" pitchFamily="34" charset="-120"/>
-              </a:rPr>
-              <a:t>: </a:t>
-            </a:r>
-            <a:r>
-              <a:rPr lang="en-US" sz="1400" b="1" dirty="0">
-                <a:solidFill>
-                  <a:srgbClr val="232F3E"/>
-                </a:solidFill>
-                <a:latin typeface="맑은 고딕" pitchFamily="34" charset="0"/>
-                <a:ea typeface="맑은 고딕" pitchFamily="34" charset="-122"/>
-                <a:cs typeface="맑은 고딕" pitchFamily="34" charset="-120"/>
-              </a:rPr>
-              <a:t>개인키로 R을 암호화</a:t>
+              <a:t> : 개인키로 R을 암호화</a:t>
             </a:r>
             <a:endParaRPr lang="en-US" sz="1400" dirty="0"/>
           </a:p>
@@ -19474,7 +20932,7 @@
               <a:buNone/>
             </a:pPr>
             <a:r>
-              <a:rPr lang="en-US" sz="1600" b="1" dirty="0" smtClean="0">
+              <a:rPr lang="en-US" sz="1600" b="1" dirty="0">
                 <a:solidFill>
                   <a:srgbClr val="232F3E"/>
                 </a:solidFill>
@@ -19482,18 +20940,7 @@
                 <a:ea typeface="맑은 고딕" pitchFamily="34" charset="-122"/>
                 <a:cs typeface="맑은 고딕" pitchFamily="34" charset="-120"/>
               </a:rPr>
-              <a:t>④ </a:t>
-            </a:r>
-            <a:r>
-              <a:rPr lang="en-US" sz="1600" b="1" dirty="0">
-                <a:solidFill>
-                  <a:srgbClr val="232F3E"/>
-                </a:solidFill>
-                <a:latin typeface="맑은 고딕" pitchFamily="34" charset="0"/>
-                <a:ea typeface="맑은 고딕" pitchFamily="34" charset="-122"/>
-                <a:cs typeface="맑은 고딕" pitchFamily="34" charset="-120"/>
-              </a:rPr>
-              <a:t>{[R]</a:t>
+              <a:t>④ {[R]</a:t>
             </a:r>
             <a:r>
               <a:rPr lang="en-US" sz="1000" b="1" dirty="0">
@@ -19542,6 +20989,13 @@
           </a:solidFill>
           <a:ln/>
         </p:spPr>
+        <p:txBody>
+          <a:bodyPr/>
+          <a:lstStyle/>
+          <a:p>
+            <a:endParaRPr lang="ko-KR" altLang="en-US"/>
+          </a:p>
+        </p:txBody>
       </p:sp>
       <p:sp>
         <p:nvSpPr>
@@ -19626,7 +21080,7 @@
               <a:t> </a:t>
             </a:r>
             <a:r>
-              <a:rPr lang="en-US" sz="1350" dirty="0" err="1" smtClean="0">
+              <a:rPr lang="en-US" sz="1350" dirty="0" err="1">
                 <a:solidFill>
                   <a:srgbClr val="FFFFFF"/>
                 </a:solidFill>
@@ -19637,7 +21091,7 @@
               <a:t>R’을</a:t>
             </a:r>
             <a:r>
-              <a:rPr lang="en-US" sz="1350" dirty="0" smtClean="0">
+              <a:rPr lang="en-US" sz="1350" dirty="0">
                 <a:solidFill>
                   <a:srgbClr val="FFFFFF"/>
                 </a:solidFill>
@@ -19645,9 +21099,42 @@
                 <a:ea typeface="맑은 고딕" pitchFamily="34" charset="-122"/>
                 <a:cs typeface="맑은 고딕" pitchFamily="34" charset="-120"/>
               </a:rPr>
+              <a:t> 얻고, </a:t>
+            </a:r>
+            <a:r>
+              <a:rPr lang="en-US" sz="1350" b="1" dirty="0">
+                <a:solidFill>
+                  <a:srgbClr val="FF9900"/>
+                </a:solidFill>
+                <a:latin typeface="맑은 고딕" pitchFamily="34" charset="0"/>
+                <a:ea typeface="맑은 고딕" pitchFamily="34" charset="-122"/>
+                <a:cs typeface="맑은 고딕" pitchFamily="34" charset="-120"/>
+              </a:rPr>
+              <a:t>R = R’</a:t>
+            </a:r>
+            <a:r>
+              <a:rPr lang="en-US" sz="1350" dirty="0">
+                <a:solidFill>
+                  <a:srgbClr val="FFFFFF"/>
+                </a:solidFill>
+                <a:latin typeface="맑은 고딕" pitchFamily="34" charset="0"/>
+                <a:ea typeface="맑은 고딕" pitchFamily="34" charset="-122"/>
+                <a:cs typeface="맑은 고딕" pitchFamily="34" charset="-120"/>
+              </a:rPr>
               <a:t> </a:t>
             </a:r>
             <a:r>
+              <a:rPr lang="en-US" sz="1350" dirty="0" err="1">
+                <a:solidFill>
+                  <a:srgbClr val="FFFFFF"/>
+                </a:solidFill>
+                <a:latin typeface="맑은 고딕" pitchFamily="34" charset="0"/>
+                <a:ea typeface="맑은 고딕" pitchFamily="34" charset="-122"/>
+                <a:cs typeface="맑은 고딕" pitchFamily="34" charset="-120"/>
+              </a:rPr>
+              <a:t>이면</a:t>
+            </a:r>
+            <a:r>
               <a:rPr lang="en-US" sz="1350" dirty="0">
                 <a:solidFill>
                   <a:srgbClr val="FFFFFF"/>
@@ -19656,32 +21143,10 @@
                 <a:ea typeface="맑은 고딕" pitchFamily="34" charset="-122"/>
                 <a:cs typeface="맑은 고딕" pitchFamily="34" charset="-120"/>
               </a:rPr>
-              <a:t>얻고, </a:t>
-            </a:r>
-            <a:r>
-              <a:rPr lang="en-US" sz="1350" b="1" dirty="0">
-                <a:solidFill>
-                  <a:srgbClr val="FF9900"/>
-                </a:solidFill>
-                <a:latin typeface="맑은 고딕" pitchFamily="34" charset="0"/>
-                <a:ea typeface="맑은 고딕" pitchFamily="34" charset="-122"/>
-                <a:cs typeface="맑은 고딕" pitchFamily="34" charset="-120"/>
-              </a:rPr>
-              <a:t>R = </a:t>
-            </a:r>
-            <a:r>
-              <a:rPr lang="en-US" sz="1350" b="1" dirty="0" smtClean="0">
-                <a:solidFill>
-                  <a:srgbClr val="FF9900"/>
-                </a:solidFill>
-                <a:latin typeface="맑은 고딕" pitchFamily="34" charset="0"/>
-                <a:ea typeface="맑은 고딕" pitchFamily="34" charset="-122"/>
-                <a:cs typeface="맑은 고딕" pitchFamily="34" charset="-120"/>
-              </a:rPr>
-              <a:t>R’</a:t>
-            </a:r>
-            <a:r>
-              <a:rPr lang="en-US" sz="1350" dirty="0" smtClean="0">
+              <a:t> </a:t>
+            </a:r>
+            <a:r>
+              <a:rPr lang="en-US" sz="1350" dirty="0" err="1">
                 <a:solidFill>
                   <a:srgbClr val="FFFFFF"/>
                 </a:solidFill>
@@ -19689,10 +21154,21 @@
                 <a:ea typeface="맑은 고딕" pitchFamily="34" charset="-122"/>
                 <a:cs typeface="맑은 고딕" pitchFamily="34" charset="-120"/>
               </a:rPr>
+              <a:t>인증</a:t>
+            </a:r>
+            <a:r>
+              <a:rPr lang="en-US" sz="1350" dirty="0">
+                <a:solidFill>
+                  <a:srgbClr val="FFFFFF"/>
+                </a:solidFill>
+                <a:latin typeface="맑은 고딕" pitchFamily="34" charset="0"/>
+                <a:ea typeface="맑은 고딕" pitchFamily="34" charset="-122"/>
+                <a:cs typeface="맑은 고딕" pitchFamily="34" charset="-120"/>
+              </a:rPr>
               <a:t> </a:t>
             </a:r>
             <a:r>
-              <a:rPr lang="en-US" sz="1350" dirty="0" err="1">
+              <a:rPr lang="ko-KR" altLang="en-US" sz="1350" dirty="0">
                 <a:solidFill>
                   <a:srgbClr val="FFFFFF"/>
                 </a:solidFill>
@@ -19700,54 +21176,10 @@
                 <a:ea typeface="맑은 고딕" pitchFamily="34" charset="-122"/>
                 <a:cs typeface="맑은 고딕" pitchFamily="34" charset="-120"/>
               </a:rPr>
-              <a:t>이면</a:t>
+              <a:t>성</a:t>
             </a:r>
             <a:r>
               <a:rPr lang="en-US" sz="1350" dirty="0">
-                <a:solidFill>
-                  <a:srgbClr val="FFFFFF"/>
-                </a:solidFill>
-                <a:latin typeface="맑은 고딕" pitchFamily="34" charset="0"/>
-                <a:ea typeface="맑은 고딕" pitchFamily="34" charset="-122"/>
-                <a:cs typeface="맑은 고딕" pitchFamily="34" charset="-120"/>
-              </a:rPr>
-              <a:t> </a:t>
-            </a:r>
-            <a:r>
-              <a:rPr lang="en-US" sz="1350" dirty="0" err="1" smtClean="0">
-                <a:solidFill>
-                  <a:srgbClr val="FFFFFF"/>
-                </a:solidFill>
-                <a:latin typeface="맑은 고딕" pitchFamily="34" charset="0"/>
-                <a:ea typeface="맑은 고딕" pitchFamily="34" charset="-122"/>
-                <a:cs typeface="맑은 고딕" pitchFamily="34" charset="-120"/>
-              </a:rPr>
-              <a:t>인증</a:t>
-            </a:r>
-            <a:r>
-              <a:rPr lang="en-US" sz="1350" dirty="0" smtClean="0">
-                <a:solidFill>
-                  <a:srgbClr val="FFFFFF"/>
-                </a:solidFill>
-                <a:latin typeface="맑은 고딕" pitchFamily="34" charset="0"/>
-                <a:ea typeface="맑은 고딕" pitchFamily="34" charset="-122"/>
-                <a:cs typeface="맑은 고딕" pitchFamily="34" charset="-120"/>
-              </a:rPr>
-              <a:t> </a:t>
-            </a:r>
-            <a:r>
-              <a:rPr lang="ko-KR" altLang="en-US" sz="1350" dirty="0">
-                <a:solidFill>
-                  <a:srgbClr val="FFFFFF"/>
-                </a:solidFill>
-                <a:latin typeface="맑은 고딕" pitchFamily="34" charset="0"/>
-                <a:ea typeface="맑은 고딕" pitchFamily="34" charset="-122"/>
-                <a:cs typeface="맑은 고딕" pitchFamily="34" charset="-120"/>
-              </a:rPr>
-              <a:t>성</a:t>
-            </a:r>
-            <a:r>
-              <a:rPr lang="en-US" sz="1350" dirty="0" smtClean="0">
                 <a:solidFill>
                   <a:srgbClr val="FFFFFF"/>
                 </a:solidFill>
@@ -20060,6 +21492,13 @@
             <a:tailEnd type="none" w="med" len="med"/>
           </a:ln>
         </p:spPr>
+        <p:txBody>
+          <a:bodyPr/>
+          <a:lstStyle/>
+          <a:p>
+            <a:endParaRPr lang="ko-KR" altLang="en-US"/>
+          </a:p>
+        </p:txBody>
       </p:sp>
     </p:spTree>
   </p:cSld>
@@ -20120,6 +21559,13 @@
             <a:prstDash val="solid"/>
           </a:ln>
         </p:spPr>
+        <p:txBody>
+          <a:bodyPr/>
+          <a:lstStyle/>
+          <a:p>
+            <a:endParaRPr lang="ko-KR" altLang="en-US"/>
+          </a:p>
+        </p:txBody>
       </p:sp>
       <p:sp>
         <p:nvSpPr>
@@ -20225,6 +21671,13 @@
             </a:outerShdw>
           </a:effectLst>
         </p:spPr>
+        <p:txBody>
+          <a:bodyPr/>
+          <a:lstStyle/>
+          <a:p>
+            <a:endParaRPr lang="ko-KR" altLang="en-US"/>
+          </a:p>
+        </p:txBody>
       </p:sp>
       <p:sp>
         <p:nvSpPr>
@@ -20298,6 +21751,13 @@
             </a:outerShdw>
           </a:effectLst>
         </p:spPr>
+        <p:txBody>
+          <a:bodyPr/>
+          <a:lstStyle/>
+          <a:p>
+            <a:endParaRPr lang="ko-KR" altLang="en-US"/>
+          </a:p>
+        </p:txBody>
       </p:sp>
       <p:sp>
         <p:nvSpPr>
@@ -20320,6 +21780,13 @@
           </a:solidFill>
           <a:ln/>
         </p:spPr>
+        <p:txBody>
+          <a:bodyPr/>
+          <a:lstStyle/>
+          <a:p>
+            <a:endParaRPr lang="ko-KR" altLang="en-US"/>
+          </a:p>
+        </p:txBody>
       </p:sp>
       <p:sp>
         <p:nvSpPr>
@@ -20340,6 +21807,13 @@
           </a:solidFill>
           <a:ln/>
         </p:spPr>
+        <p:txBody>
+          <a:bodyPr/>
+          <a:lstStyle/>
+          <a:p>
+            <a:endParaRPr lang="ko-KR" altLang="en-US"/>
+          </a:p>
+        </p:txBody>
       </p:sp>
       <p:sp>
         <p:nvSpPr>
@@ -20363,6 +21837,13 @@
             <a:prstDash val="solid"/>
           </a:ln>
         </p:spPr>
+        <p:txBody>
+          <a:bodyPr/>
+          <a:lstStyle/>
+          <a:p>
+            <a:endParaRPr lang="ko-KR" altLang="en-US"/>
+          </a:p>
+        </p:txBody>
       </p:sp>
       <p:sp>
         <p:nvSpPr>
@@ -20383,6 +21864,13 @@
           </a:solidFill>
           <a:ln/>
         </p:spPr>
+        <p:txBody>
+          <a:bodyPr/>
+          <a:lstStyle/>
+          <a:p>
+            <a:endParaRPr lang="ko-KR" altLang="en-US"/>
+          </a:p>
+        </p:txBody>
       </p:sp>
       <p:sp>
         <p:nvSpPr>
@@ -20403,6 +21891,13 @@
           </a:solidFill>
           <a:ln/>
         </p:spPr>
+        <p:txBody>
+          <a:bodyPr/>
+          <a:lstStyle/>
+          <a:p>
+            <a:endParaRPr lang="ko-KR" altLang="en-US"/>
+          </a:p>
+        </p:txBody>
       </p:sp>
       <p:sp>
         <p:nvSpPr>
@@ -20423,6 +21918,13 @@
           </a:solidFill>
           <a:ln/>
         </p:spPr>
+        <p:txBody>
+          <a:bodyPr/>
+          <a:lstStyle/>
+          <a:p>
+            <a:endParaRPr lang="ko-KR" altLang="en-US"/>
+          </a:p>
+        </p:txBody>
       </p:sp>
       <p:pic>
         <p:nvPicPr>
@@ -20474,6 +21976,13 @@
             </a:outerShdw>
           </a:effectLst>
         </p:spPr>
+        <p:txBody>
+          <a:bodyPr/>
+          <a:lstStyle/>
+          <a:p>
+            <a:endParaRPr lang="ko-KR" altLang="en-US"/>
+          </a:p>
+        </p:txBody>
       </p:sp>
       <p:sp>
         <p:nvSpPr>
@@ -20547,6 +22056,13 @@
             </a:outerShdw>
           </a:effectLst>
         </p:spPr>
+        <p:txBody>
+          <a:bodyPr/>
+          <a:lstStyle/>
+          <a:p>
+            <a:endParaRPr lang="ko-KR" altLang="en-US"/>
+          </a:p>
+        </p:txBody>
       </p:sp>
       <p:sp>
         <p:nvSpPr>
@@ -20569,6 +22085,13 @@
           </a:solidFill>
           <a:ln/>
         </p:spPr>
+        <p:txBody>
+          <a:bodyPr/>
+          <a:lstStyle/>
+          <a:p>
+            <a:endParaRPr lang="ko-KR" altLang="en-US"/>
+          </a:p>
+        </p:txBody>
       </p:sp>
       <p:sp>
         <p:nvSpPr>
@@ -20589,6 +22112,13 @@
           </a:solidFill>
           <a:ln/>
         </p:spPr>
+        <p:txBody>
+          <a:bodyPr/>
+          <a:lstStyle/>
+          <a:p>
+            <a:endParaRPr lang="ko-KR" altLang="en-US"/>
+          </a:p>
+        </p:txBody>
       </p:sp>
       <p:sp>
         <p:nvSpPr>
@@ -20612,6 +22142,13 @@
             <a:prstDash val="solid"/>
           </a:ln>
         </p:spPr>
+        <p:txBody>
+          <a:bodyPr/>
+          <a:lstStyle/>
+          <a:p>
+            <a:endParaRPr lang="ko-KR" altLang="en-US"/>
+          </a:p>
+        </p:txBody>
       </p:sp>
       <p:sp>
         <p:nvSpPr>
@@ -20632,6 +22169,13 @@
           </a:solidFill>
           <a:ln/>
         </p:spPr>
+        <p:txBody>
+          <a:bodyPr/>
+          <a:lstStyle/>
+          <a:p>
+            <a:endParaRPr lang="ko-KR" altLang="en-US"/>
+          </a:p>
+        </p:txBody>
       </p:sp>
       <p:sp>
         <p:nvSpPr>
@@ -20652,6 +22196,13 @@
           </a:solidFill>
           <a:ln/>
         </p:spPr>
+        <p:txBody>
+          <a:bodyPr/>
+          <a:lstStyle/>
+          <a:p>
+            <a:endParaRPr lang="ko-KR" altLang="en-US"/>
+          </a:p>
+        </p:txBody>
       </p:sp>
       <p:sp>
         <p:nvSpPr>
@@ -20672,6 +22223,13 @@
           </a:solidFill>
           <a:ln/>
         </p:spPr>
+        <p:txBody>
+          <a:bodyPr/>
+          <a:lstStyle/>
+          <a:p>
+            <a:endParaRPr lang="ko-KR" altLang="en-US"/>
+          </a:p>
+        </p:txBody>
       </p:sp>
       <p:pic>
         <p:nvPicPr>
@@ -20723,6 +22281,13 @@
             </a:outerShdw>
           </a:effectLst>
         </p:spPr>
+        <p:txBody>
+          <a:bodyPr/>
+          <a:lstStyle/>
+          <a:p>
+            <a:endParaRPr lang="ko-KR" altLang="en-US"/>
+          </a:p>
+        </p:txBody>
       </p:sp>
       <p:sp>
         <p:nvSpPr>
@@ -20796,6 +22361,13 @@
             </a:outerShdw>
           </a:effectLst>
         </p:spPr>
+        <p:txBody>
+          <a:bodyPr/>
+          <a:lstStyle/>
+          <a:p>
+            <a:endParaRPr lang="ko-KR" altLang="en-US"/>
+          </a:p>
+        </p:txBody>
       </p:sp>
       <p:sp>
         <p:nvSpPr>
@@ -20818,6 +22390,13 @@
           </a:solidFill>
           <a:ln/>
         </p:spPr>
+        <p:txBody>
+          <a:bodyPr/>
+          <a:lstStyle/>
+          <a:p>
+            <a:endParaRPr lang="ko-KR" altLang="en-US"/>
+          </a:p>
+        </p:txBody>
       </p:sp>
       <p:sp>
         <p:nvSpPr>
@@ -20838,6 +22417,13 @@
           </a:solidFill>
           <a:ln/>
         </p:spPr>
+        <p:txBody>
+          <a:bodyPr/>
+          <a:lstStyle/>
+          <a:p>
+            <a:endParaRPr lang="ko-KR" altLang="en-US"/>
+          </a:p>
+        </p:txBody>
       </p:sp>
       <p:sp>
         <p:nvSpPr>
@@ -20861,6 +22447,13 @@
             <a:prstDash val="solid"/>
           </a:ln>
         </p:spPr>
+        <p:txBody>
+          <a:bodyPr/>
+          <a:lstStyle/>
+          <a:p>
+            <a:endParaRPr lang="ko-KR" altLang="en-US"/>
+          </a:p>
+        </p:txBody>
       </p:sp>
       <p:sp>
         <p:nvSpPr>
@@ -20881,6 +22474,13 @@
           </a:solidFill>
           <a:ln/>
         </p:spPr>
+        <p:txBody>
+          <a:bodyPr/>
+          <a:lstStyle/>
+          <a:p>
+            <a:endParaRPr lang="ko-KR" altLang="en-US"/>
+          </a:p>
+        </p:txBody>
       </p:sp>
       <p:sp>
         <p:nvSpPr>
@@ -20901,6 +22501,13 @@
           </a:solidFill>
           <a:ln/>
         </p:spPr>
+        <p:txBody>
+          <a:bodyPr/>
+          <a:lstStyle/>
+          <a:p>
+            <a:endParaRPr lang="ko-KR" altLang="en-US"/>
+          </a:p>
+        </p:txBody>
       </p:sp>
       <p:sp>
         <p:nvSpPr>
@@ -20921,6 +22528,13 @@
           </a:solidFill>
           <a:ln/>
         </p:spPr>
+        <p:txBody>
+          <a:bodyPr/>
+          <a:lstStyle/>
+          <a:p>
+            <a:endParaRPr lang="ko-KR" altLang="en-US"/>
+          </a:p>
+        </p:txBody>
       </p:sp>
       <p:pic>
         <p:nvPicPr>
@@ -21004,7 +22618,7 @@
               <a:t> </a:t>
             </a:r>
             <a:r>
-              <a:rPr lang="en-US" sz="1150" dirty="0" err="1" smtClean="0">
+              <a:rPr lang="en-US" sz="1150" dirty="0" err="1">
                 <a:solidFill>
                   <a:srgbClr val="5C6B7A"/>
                 </a:solidFill>
@@ -21083,6 +22697,13 @@
             <a:prstDash val="solid"/>
           </a:ln>
         </p:spPr>
+        <p:txBody>
+          <a:bodyPr/>
+          <a:lstStyle/>
+          <a:p>
+            <a:endParaRPr lang="ko-KR" altLang="en-US"/>
+          </a:p>
+        </p:txBody>
       </p:sp>
       <p:sp>
         <p:nvSpPr>
@@ -21105,6 +22726,13 @@
           </a:solidFill>
           <a:ln/>
         </p:spPr>
+        <p:txBody>
+          <a:bodyPr/>
+          <a:lstStyle/>
+          <a:p>
+            <a:endParaRPr lang="ko-KR" altLang="en-US"/>
+          </a:p>
+        </p:txBody>
       </p:sp>
       <p:sp>
         <p:nvSpPr>
